--- a/statistics_07c_F_ANOVA.pptx
+++ b/statistics_07c_F_ANOVA.pptx
@@ -13185,24 +13185,39 @@
           <a:lstStyle/>
           <a:p>
             <a:r>
-              <a:rPr lang="en-US" sz="2800" b="1" dirty="0"/>
+              <a:rPr lang="en-US" sz="2800" b="1" dirty="0">
+                <a:latin typeface="Calibri" panose="020F0502020204030204" pitchFamily="34" charset="0"/>
+                <a:cs typeface="Calibri" panose="020F0502020204030204" pitchFamily="34" charset="0"/>
+              </a:rPr>
               <a:t>F-Distribution (Fisher–</a:t>
             </a:r>
             <a:r>
-              <a:rPr lang="en-US" sz="2800" b="1" dirty="0" err="1"/>
+              <a:rPr lang="en-US" sz="2800" b="1" dirty="0" err="1">
+                <a:latin typeface="Calibri" panose="020F0502020204030204" pitchFamily="34" charset="0"/>
+                <a:cs typeface="Calibri" panose="020F0502020204030204" pitchFamily="34" charset="0"/>
+              </a:rPr>
               <a:t>Snedecor</a:t>
             </a:r>
             <a:r>
-              <a:rPr lang="en-US" sz="2800" b="1" dirty="0"/>
+              <a:rPr lang="en-US" sz="2800" b="1" dirty="0">
+                <a:latin typeface="Calibri" panose="020F0502020204030204" pitchFamily="34" charset="0"/>
+                <a:cs typeface="Calibri" panose="020F0502020204030204" pitchFamily="34" charset="0"/>
+              </a:rPr>
               <a:t>)</a:t>
             </a:r>
           </a:p>
           <a:p>
-            <a:endParaRPr lang="en-US" sz="1200" b="1" dirty="0"/>
+            <a:endParaRPr lang="en-US" sz="1200" b="1" dirty="0">
+              <a:latin typeface="Calibri" panose="020F0502020204030204" pitchFamily="34" charset="0"/>
+              <a:cs typeface="Calibri" panose="020F0502020204030204" pitchFamily="34" charset="0"/>
+            </a:endParaRPr>
           </a:p>
           <a:p>
             <a:r>
-              <a:rPr lang="en-US" dirty="0"/>
+              <a:rPr lang="en-US" dirty="0">
+                <a:latin typeface="Calibri" panose="020F0502020204030204" pitchFamily="34" charset="0"/>
+                <a:cs typeface="Calibri" panose="020F0502020204030204" pitchFamily="34" charset="0"/>
+              </a:rPr>
               <a:t>F-distribution </a:t>
             </a:r>
           </a:p>
@@ -13212,18 +13227,49 @@
               <a:buChar char="•"/>
             </a:pPr>
             <a:r>
-              <a:rPr lang="en-US" dirty="0"/>
-              <a:t>right-skewed distribution used most commonly in ANOVA (Analysis of Variance). - ( </a:t>
-            </a:r>
-            <a:r>
               <a:rPr lang="en-US" dirty="0">
+                <a:latin typeface="Calibri" panose="020F0502020204030204" pitchFamily="34" charset="0"/>
+                <a:cs typeface="Calibri" panose="020F0502020204030204" pitchFamily="34" charset="0"/>
+              </a:rPr>
+              <a:t>right-skewed distribution used most commonly in </a:t>
+            </a:r>
+            <a:r>
+              <a:rPr lang="en-US" b="1" dirty="0">
+                <a:solidFill>
+                  <a:srgbClr val="00B050"/>
+                </a:solidFill>
+                <a:latin typeface="Calibri" panose="020F0502020204030204" pitchFamily="34" charset="0"/>
+                <a:cs typeface="Calibri" panose="020F0502020204030204" pitchFamily="34" charset="0"/>
+              </a:rPr>
+              <a:t>ANOVA (Analysis of Variance)</a:t>
+            </a:r>
+            <a:br>
+              <a:rPr lang="en-US" dirty="0">
+                <a:latin typeface="Calibri" panose="020F0502020204030204" pitchFamily="34" charset="0"/>
+                <a:cs typeface="Calibri" panose="020F0502020204030204" pitchFamily="34" charset="0"/>
+              </a:rPr>
+            </a:br>
+            <a:r>
+              <a:rPr lang="en-US" dirty="0">
+                <a:latin typeface="Calibri" panose="020F0502020204030204" pitchFamily="34" charset="0"/>
+                <a:cs typeface="Calibri" panose="020F0502020204030204" pitchFamily="34" charset="0"/>
+              </a:rPr>
+              <a:t>.. </a:t>
+            </a:r>
+            <a:r>
+              <a:rPr lang="en-US" dirty="0">
+                <a:latin typeface="Calibri" panose="020F0502020204030204" pitchFamily="34" charset="0"/>
+                <a:cs typeface="Calibri" panose="020F0502020204030204" pitchFamily="34" charset="0"/>
                 <a:hlinkClick r:id="rId2"/>
               </a:rPr>
               <a:t>https://en.wikipedia.org/wiki/F-distribution</a:t>
             </a:r>
             <a:r>
-              <a:rPr lang="en-US" dirty="0"/>
-              <a:t> ) </a:t>
+              <a:rPr lang="en-US" dirty="0">
+                <a:latin typeface="Calibri" panose="020F0502020204030204" pitchFamily="34" charset="0"/>
+                <a:cs typeface="Calibri" panose="020F0502020204030204" pitchFamily="34" charset="0"/>
+              </a:rPr>
+              <a:t> </a:t>
             </a:r>
           </a:p>
           <a:p>
@@ -13232,14 +13278,56 @@
               <a:buChar char="•"/>
             </a:pPr>
             <a:r>
-              <a:rPr lang="en-US" dirty="0"/>
-              <a:t>named after Ronald Fisher and George W. </a:t>
-            </a:r>
-            <a:r>
-              <a:rPr lang="en-US" dirty="0" err="1"/>
+              <a:rPr lang="en-US" dirty="0">
+                <a:latin typeface="Calibri" panose="020F0502020204030204" pitchFamily="34" charset="0"/>
+                <a:cs typeface="Calibri" panose="020F0502020204030204" pitchFamily="34" charset="0"/>
+              </a:rPr>
+              <a:t>named after </a:t>
+            </a:r>
+            <a:r>
+              <a:rPr lang="en-US" b="1" dirty="0">
+                <a:solidFill>
+                  <a:srgbClr val="00B050"/>
+                </a:solidFill>
+                <a:latin typeface="Calibri" panose="020F0502020204030204" pitchFamily="34" charset="0"/>
+                <a:cs typeface="Calibri" panose="020F0502020204030204" pitchFamily="34" charset="0"/>
+              </a:rPr>
+              <a:t>Ronald Fisher</a:t>
+            </a:r>
+            <a:r>
+              <a:rPr lang="en-US" dirty="0">
+                <a:latin typeface="Calibri" panose="020F0502020204030204" pitchFamily="34" charset="0"/>
+                <a:cs typeface="Calibri" panose="020F0502020204030204" pitchFamily="34" charset="0"/>
+              </a:rPr>
+              <a:t> and </a:t>
+            </a:r>
+            <a:r>
+              <a:rPr lang="en-US" b="1" dirty="0">
+                <a:solidFill>
+                  <a:srgbClr val="00B050"/>
+                </a:solidFill>
+                <a:latin typeface="Calibri" panose="020F0502020204030204" pitchFamily="34" charset="0"/>
+                <a:cs typeface="Calibri" panose="020F0502020204030204" pitchFamily="34" charset="0"/>
+              </a:rPr>
+              <a:t>George W. </a:t>
+            </a:r>
+            <a:r>
+              <a:rPr lang="en-US" b="1" dirty="0" err="1">
+                <a:solidFill>
+                  <a:srgbClr val="00B050"/>
+                </a:solidFill>
+                <a:latin typeface="Calibri" panose="020F0502020204030204" pitchFamily="34" charset="0"/>
+                <a:cs typeface="Calibri" panose="020F0502020204030204" pitchFamily="34" charset="0"/>
+              </a:rPr>
               <a:t>Snedecor</a:t>
             </a:r>
-            <a:endParaRPr lang="en-US" dirty="0"/>
+            <a:endParaRPr lang="en-US" b="1" dirty="0">
+              <a:solidFill>
+                <a:srgbClr val="00B050"/>
+              </a:solidFill>
+              <a:latin typeface="Calibri" panose="020F0502020204030204" pitchFamily="34" charset="0"/>
+              <a:cs typeface="Calibri" panose="020F0502020204030204" pitchFamily="34" charset="0"/>
+            </a:endParaRPr>
           </a:p>
         </p:txBody>
       </p:sp>
@@ -13364,8 +13452,8 @@
         </p:nvSpPr>
         <p:spPr>
           <a:xfrm>
-            <a:off x="541177" y="3511296"/>
-            <a:ext cx="2473732" cy="738664"/>
+            <a:off x="798309" y="3429000"/>
+            <a:ext cx="1875578" cy="738664"/>
           </a:xfrm>
           <a:prstGeom prst="rect">
             <a:avLst/>
@@ -13378,15 +13466,36 @@
           </a:bodyPr>
           <a:lstStyle/>
           <a:p>
-            <a:r>
-              <a:rPr lang="en-US" dirty="0"/>
-              <a:t>Ronald Fisher 1890-1962</a:t>
+            <a:pPr algn="ctr"/>
+            <a:r>
+              <a:rPr lang="en-US" dirty="0">
+                <a:latin typeface="Calibri" panose="020F0502020204030204" pitchFamily="34" charset="0"/>
+                <a:cs typeface="Calibri" panose="020F0502020204030204" pitchFamily="34" charset="0"/>
+              </a:rPr>
+              <a:t>Ronald Fisher</a:t>
+            </a:r>
+            <a:br>
+              <a:rPr lang="en-US" dirty="0">
+                <a:latin typeface="Calibri" panose="020F0502020204030204" pitchFamily="34" charset="0"/>
+                <a:cs typeface="Calibri" panose="020F0502020204030204" pitchFamily="34" charset="0"/>
+              </a:rPr>
+            </a:br>
+            <a:r>
+              <a:rPr lang="en-US" dirty="0">
+                <a:latin typeface="Calibri" panose="020F0502020204030204" pitchFamily="34" charset="0"/>
+                <a:cs typeface="Calibri" panose="020F0502020204030204" pitchFamily="34" charset="0"/>
+              </a:rPr>
+              <a:t>1890-1962, British. </a:t>
             </a:r>
           </a:p>
           <a:p>
-            <a:r>
-              <a:rPr lang="en-US" dirty="0"/>
-              <a:t>British. Developed the analysis of variance ANOVA</a:t>
+            <a:pPr algn="ctr"/>
+            <a:r>
+              <a:rPr lang="en-US" dirty="0">
+                <a:latin typeface="Calibri" panose="020F0502020204030204" pitchFamily="34" charset="0"/>
+                <a:cs typeface="Calibri" panose="020F0502020204030204" pitchFamily="34" charset="0"/>
+              </a:rPr>
+              <a:t>Developed ANOVA</a:t>
             </a:r>
           </a:p>
         </p:txBody>
@@ -13419,19 +13528,33 @@
           </a:bodyPr>
           <a:lstStyle/>
           <a:p>
-            <a:r>
-              <a:rPr lang="en-US" dirty="0"/>
+            <a:pPr algn="ctr"/>
+            <a:r>
+              <a:rPr lang="en-US" dirty="0">
+                <a:latin typeface="Calibri" panose="020F0502020204030204" pitchFamily="34" charset="0"/>
+                <a:cs typeface="Calibri" panose="020F0502020204030204" pitchFamily="34" charset="0"/>
+              </a:rPr>
               <a:t>George W. </a:t>
             </a:r>
             <a:r>
-              <a:rPr lang="en-US" dirty="0" err="1"/>
+              <a:rPr lang="en-US" dirty="0" err="1">
+                <a:latin typeface="Calibri" panose="020F0502020204030204" pitchFamily="34" charset="0"/>
+                <a:cs typeface="Calibri" panose="020F0502020204030204" pitchFamily="34" charset="0"/>
+              </a:rPr>
               <a:t>Snedecor</a:t>
             </a:r>
-            <a:endParaRPr lang="en-US" dirty="0"/>
+            <a:endParaRPr lang="en-US" dirty="0">
+              <a:latin typeface="Calibri" panose="020F0502020204030204" pitchFamily="34" charset="0"/>
+              <a:cs typeface="Calibri" panose="020F0502020204030204" pitchFamily="34" charset="0"/>
+            </a:endParaRPr>
           </a:p>
           <a:p>
-            <a:r>
-              <a:rPr lang="en-US" dirty="0"/>
+            <a:pPr algn="ctr"/>
+            <a:r>
+              <a:rPr lang="en-US" dirty="0">
+                <a:latin typeface="Calibri" panose="020F0502020204030204" pitchFamily="34" charset="0"/>
+                <a:cs typeface="Calibri" panose="020F0502020204030204" pitchFamily="34" charset="0"/>
+              </a:rPr>
               <a:t>1881-1974, USA </a:t>
             </a:r>
           </a:p>
@@ -13466,16 +13589,25 @@
           <a:lstStyle/>
           <a:p>
             <a:r>
-              <a:rPr lang="en-US" dirty="0"/>
+              <a:rPr lang="en-US" dirty="0">
+                <a:latin typeface="Calibri" panose="020F0502020204030204" pitchFamily="34" charset="0"/>
+                <a:cs typeface="Calibri" panose="020F0502020204030204" pitchFamily="34" charset="0"/>
+              </a:rPr>
               <a:t>A random variate of the F-distribution is a ratio:</a:t>
             </a:r>
           </a:p>
           <a:p>
-            <a:endParaRPr lang="en-US" dirty="0"/>
+            <a:endParaRPr lang="en-US" dirty="0">
+              <a:latin typeface="Calibri" panose="020F0502020204030204" pitchFamily="34" charset="0"/>
+              <a:cs typeface="Calibri" panose="020F0502020204030204" pitchFamily="34" charset="0"/>
+            </a:endParaRPr>
           </a:p>
           <a:p>
             <a:r>
-              <a:rPr lang="en-US" dirty="0"/>
+              <a:rPr lang="en-US" dirty="0">
+                <a:latin typeface="Calibri" panose="020F0502020204030204" pitchFamily="34" charset="0"/>
+                <a:cs typeface="Calibri" panose="020F0502020204030204" pitchFamily="34" charset="0"/>
+              </a:rPr>
               <a:t>                 </a:t>
             </a:r>
             <a:r>
@@ -13483,6 +13615,8 @@
                 <a:solidFill>
                   <a:srgbClr val="0070C0"/>
                 </a:solidFill>
+                <a:latin typeface="Calibri" panose="020F0502020204030204" pitchFamily="34" charset="0"/>
+                <a:cs typeface="Calibri" panose="020F0502020204030204" pitchFamily="34" charset="0"/>
               </a:rPr>
               <a:t>F    =    Variance1 / Variance2    =    (U</a:t>
             </a:r>
@@ -13491,6 +13625,8 @@
                 <a:solidFill>
                   <a:srgbClr val="0070C0"/>
                 </a:solidFill>
+                <a:latin typeface="Calibri" panose="020F0502020204030204" pitchFamily="34" charset="0"/>
+                <a:cs typeface="Calibri" panose="020F0502020204030204" pitchFamily="34" charset="0"/>
               </a:rPr>
               <a:t>1</a:t>
             </a:r>
@@ -13499,6 +13635,8 @@
                 <a:solidFill>
                   <a:srgbClr val="0070C0"/>
                 </a:solidFill>
+                <a:latin typeface="Calibri" panose="020F0502020204030204" pitchFamily="34" charset="0"/>
+                <a:cs typeface="Calibri" panose="020F0502020204030204" pitchFamily="34" charset="0"/>
               </a:rPr>
               <a:t>/d</a:t>
             </a:r>
@@ -13507,6 +13645,8 @@
                 <a:solidFill>
                   <a:srgbClr val="0070C0"/>
                 </a:solidFill>
+                <a:latin typeface="Calibri" panose="020F0502020204030204" pitchFamily="34" charset="0"/>
+                <a:cs typeface="Calibri" panose="020F0502020204030204" pitchFamily="34" charset="0"/>
               </a:rPr>
               <a:t>1</a:t>
             </a:r>
@@ -13515,6 +13655,8 @@
                 <a:solidFill>
                   <a:srgbClr val="0070C0"/>
                 </a:solidFill>
+                <a:latin typeface="Calibri" panose="020F0502020204030204" pitchFamily="34" charset="0"/>
+                <a:cs typeface="Calibri" panose="020F0502020204030204" pitchFamily="34" charset="0"/>
               </a:rPr>
               <a:t>) / (U</a:t>
             </a:r>
@@ -13523,6 +13665,8 @@
                 <a:solidFill>
                   <a:srgbClr val="0070C0"/>
                 </a:solidFill>
+                <a:latin typeface="Calibri" panose="020F0502020204030204" pitchFamily="34" charset="0"/>
+                <a:cs typeface="Calibri" panose="020F0502020204030204" pitchFamily="34" charset="0"/>
               </a:rPr>
               <a:t>2</a:t>
             </a:r>
@@ -13531,6 +13675,8 @@
                 <a:solidFill>
                   <a:srgbClr val="0070C0"/>
                 </a:solidFill>
+                <a:latin typeface="Calibri" panose="020F0502020204030204" pitchFamily="34" charset="0"/>
+                <a:cs typeface="Calibri" panose="020F0502020204030204" pitchFamily="34" charset="0"/>
               </a:rPr>
               <a:t>/d</a:t>
             </a:r>
@@ -13539,6 +13685,8 @@
                 <a:solidFill>
                   <a:srgbClr val="0070C0"/>
                 </a:solidFill>
+                <a:latin typeface="Calibri" panose="020F0502020204030204" pitchFamily="34" charset="0"/>
+                <a:cs typeface="Calibri" panose="020F0502020204030204" pitchFamily="34" charset="0"/>
               </a:rPr>
               <a:t>2</a:t>
             </a:r>
@@ -13547,69 +13695,113 @@
                 <a:solidFill>
                   <a:srgbClr val="0070C0"/>
                 </a:solidFill>
+                <a:latin typeface="Calibri" panose="020F0502020204030204" pitchFamily="34" charset="0"/>
+                <a:cs typeface="Calibri" panose="020F0502020204030204" pitchFamily="34" charset="0"/>
               </a:rPr>
               <a:t>)</a:t>
             </a:r>
           </a:p>
           <a:p>
-            <a:endParaRPr lang="en-US" dirty="0"/>
+            <a:endParaRPr lang="en-US" dirty="0">
+              <a:latin typeface="Calibri" panose="020F0502020204030204" pitchFamily="34" charset="0"/>
+              <a:cs typeface="Calibri" panose="020F0502020204030204" pitchFamily="34" charset="0"/>
+            </a:endParaRPr>
           </a:p>
           <a:p>
             <a:r>
-              <a:rPr lang="en-US" dirty="0"/>
+              <a:rPr lang="en-US" dirty="0">
+                <a:latin typeface="Calibri" panose="020F0502020204030204" pitchFamily="34" charset="0"/>
+                <a:cs typeface="Calibri" panose="020F0502020204030204" pitchFamily="34" charset="0"/>
+              </a:rPr>
               <a:t>where U</a:t>
             </a:r>
             <a:r>
-              <a:rPr lang="en-US" baseline="-25000" dirty="0"/>
+              <a:rPr lang="en-US" baseline="-25000" dirty="0">
+                <a:latin typeface="Calibri" panose="020F0502020204030204" pitchFamily="34" charset="0"/>
+                <a:cs typeface="Calibri" panose="020F0502020204030204" pitchFamily="34" charset="0"/>
+              </a:rPr>
               <a:t>1</a:t>
             </a:r>
             <a:r>
-              <a:rPr lang="en-US" dirty="0"/>
+              <a:rPr lang="en-US" dirty="0">
+                <a:latin typeface="Calibri" panose="020F0502020204030204" pitchFamily="34" charset="0"/>
+                <a:cs typeface="Calibri" panose="020F0502020204030204" pitchFamily="34" charset="0"/>
+              </a:rPr>
               <a:t> and U</a:t>
             </a:r>
             <a:r>
-              <a:rPr lang="en-US" baseline="-25000" dirty="0"/>
+              <a:rPr lang="en-US" baseline="-25000" dirty="0">
+                <a:latin typeface="Calibri" panose="020F0502020204030204" pitchFamily="34" charset="0"/>
+                <a:cs typeface="Calibri" panose="020F0502020204030204" pitchFamily="34" charset="0"/>
+              </a:rPr>
               <a:t>2</a:t>
             </a:r>
             <a:r>
-              <a:rPr lang="en-US" dirty="0"/>
+              <a:rPr lang="en-US" dirty="0">
+                <a:latin typeface="Calibri" panose="020F0502020204030204" pitchFamily="34" charset="0"/>
+                <a:cs typeface="Calibri" panose="020F0502020204030204" pitchFamily="34" charset="0"/>
+              </a:rPr>
               <a:t> are independent and have chi-squared distributions </a:t>
             </a:r>
           </a:p>
           <a:p>
             <a:r>
-              <a:rPr lang="en-US" dirty="0"/>
+              <a:rPr lang="en-US" dirty="0">
+                <a:latin typeface="Calibri" panose="020F0502020204030204" pitchFamily="34" charset="0"/>
+                <a:cs typeface="Calibri" panose="020F0502020204030204" pitchFamily="34" charset="0"/>
+              </a:rPr>
               <a:t>with d</a:t>
             </a:r>
             <a:r>
-              <a:rPr lang="en-US" baseline="-25000" dirty="0"/>
+              <a:rPr lang="en-US" baseline="-25000" dirty="0">
+                <a:latin typeface="Calibri" panose="020F0502020204030204" pitchFamily="34" charset="0"/>
+                <a:cs typeface="Calibri" panose="020F0502020204030204" pitchFamily="34" charset="0"/>
+              </a:rPr>
               <a:t>1</a:t>
             </a:r>
             <a:r>
-              <a:rPr lang="en-US" dirty="0"/>
+              <a:rPr lang="en-US" dirty="0">
+                <a:latin typeface="Calibri" panose="020F0502020204030204" pitchFamily="34" charset="0"/>
+                <a:cs typeface="Calibri" panose="020F0502020204030204" pitchFamily="34" charset="0"/>
+              </a:rPr>
               <a:t> &amp; d</a:t>
             </a:r>
             <a:r>
-              <a:rPr lang="en-US" baseline="-25000" dirty="0"/>
+              <a:rPr lang="en-US" baseline="-25000" dirty="0">
+                <a:latin typeface="Calibri" panose="020F0502020204030204" pitchFamily="34" charset="0"/>
+                <a:cs typeface="Calibri" panose="020F0502020204030204" pitchFamily="34" charset="0"/>
+              </a:rPr>
               <a:t>2</a:t>
             </a:r>
             <a:r>
-              <a:rPr lang="en-US" dirty="0"/>
+              <a:rPr lang="en-US" dirty="0">
+                <a:latin typeface="Calibri" panose="020F0502020204030204" pitchFamily="34" charset="0"/>
+                <a:cs typeface="Calibri" panose="020F0502020204030204" pitchFamily="34" charset="0"/>
+              </a:rPr>
               <a:t> degrees of freedom respectively.</a:t>
             </a:r>
           </a:p>
           <a:p>
-            <a:endParaRPr lang="en-US" dirty="0"/>
+            <a:endParaRPr lang="en-US" dirty="0">
+              <a:latin typeface="Calibri" panose="020F0502020204030204" pitchFamily="34" charset="0"/>
+              <a:cs typeface="Calibri" panose="020F0502020204030204" pitchFamily="34" charset="0"/>
+            </a:endParaRPr>
           </a:p>
           <a:p>
             <a:r>
-              <a:rPr lang="en-US" dirty="0"/>
+              <a:rPr lang="en-US" dirty="0">
+                <a:latin typeface="Calibri" panose="020F0502020204030204" pitchFamily="34" charset="0"/>
+                <a:cs typeface="Calibri" panose="020F0502020204030204" pitchFamily="34" charset="0"/>
+              </a:rPr>
               <a:t>If d1=d2=1000, the ratio looks like normal with peak ~1.</a:t>
             </a:r>
           </a:p>
           <a:p>
             <a:r>
-              <a:rPr lang="en-US" dirty="0"/>
+              <a:rPr lang="en-US" dirty="0">
+                <a:latin typeface="Calibri" panose="020F0502020204030204" pitchFamily="34" charset="0"/>
+                <a:cs typeface="Calibri" panose="020F0502020204030204" pitchFamily="34" charset="0"/>
+              </a:rPr>
               <a:t>If numbers are smaller and not-equal – we get skewed shapes.</a:t>
             </a:r>
           </a:p>
@@ -13648,29 +13840,46 @@
                 <a:solidFill>
                   <a:srgbClr val="0070C0"/>
                 </a:solidFill>
+                <a:latin typeface="Calibri" panose="020F0502020204030204" pitchFamily="34" charset="0"/>
+                <a:cs typeface="Calibri" panose="020F0502020204030204" pitchFamily="34" charset="0"/>
               </a:rPr>
               <a:t>F-tests: </a:t>
             </a:r>
           </a:p>
           <a:p>
             <a:r>
-              <a:rPr lang="en-US" dirty="0"/>
+              <a:rPr lang="en-US" dirty="0">
+                <a:latin typeface="Calibri" panose="020F0502020204030204" pitchFamily="34" charset="0"/>
+                <a:cs typeface="Calibri" panose="020F0502020204030204" pitchFamily="34" charset="0"/>
+              </a:rPr>
               <a:t>We have two "populations" of data with normal distributions.</a:t>
             </a:r>
             <a:br>
-              <a:rPr lang="en-US" dirty="0"/>
+              <a:rPr lang="en-US" dirty="0">
+                <a:latin typeface="Calibri" panose="020F0502020204030204" pitchFamily="34" charset="0"/>
+                <a:cs typeface="Calibri" panose="020F0502020204030204" pitchFamily="34" charset="0"/>
+              </a:rPr>
             </a:br>
             <a:r>
-              <a:rPr lang="en-US" dirty="0"/>
+              <a:rPr lang="en-US" dirty="0">
+                <a:latin typeface="Calibri" panose="020F0502020204030204" pitchFamily="34" charset="0"/>
+                <a:cs typeface="Calibri" panose="020F0502020204030204" pitchFamily="34" charset="0"/>
+              </a:rPr>
               <a:t>Our Null hypothesis is that their variances are equal.</a:t>
             </a:r>
           </a:p>
           <a:p>
-            <a:endParaRPr lang="en-US" dirty="0"/>
+            <a:endParaRPr lang="en-US" dirty="0">
+              <a:latin typeface="Calibri" panose="020F0502020204030204" pitchFamily="34" charset="0"/>
+              <a:cs typeface="Calibri" panose="020F0502020204030204" pitchFamily="34" charset="0"/>
+            </a:endParaRPr>
           </a:p>
           <a:p>
             <a:r>
-              <a:rPr lang="en-US" dirty="0"/>
+              <a:rPr lang="en-US" dirty="0">
+                <a:latin typeface="Calibri" panose="020F0502020204030204" pitchFamily="34" charset="0"/>
+                <a:cs typeface="Calibri" panose="020F0502020204030204" pitchFamily="34" charset="0"/>
+              </a:rPr>
               <a:t>We calculate the F-value and look where it lands on the appropriate F-distribution to see whether it is significantly incompatible with this null hypothesis.</a:t>
             </a:r>
           </a:p>
@@ -13756,6 +13965,8 @@
                 <a:solidFill>
                   <a:srgbClr val="0070C0"/>
                 </a:solidFill>
+                <a:latin typeface="Calibri" panose="020F0502020204030204" pitchFamily="34" charset="0"/>
+                <a:cs typeface="Calibri" panose="020F0502020204030204" pitchFamily="34" charset="0"/>
               </a:rPr>
               <a:t>Reject H</a:t>
             </a:r>
@@ -13764,6 +13975,8 @@
                 <a:solidFill>
                   <a:srgbClr val="0070C0"/>
                 </a:solidFill>
+                <a:latin typeface="Calibri" panose="020F0502020204030204" pitchFamily="34" charset="0"/>
+                <a:cs typeface="Calibri" panose="020F0502020204030204" pitchFamily="34" charset="0"/>
               </a:rPr>
               <a:t>0</a:t>
             </a:r>
@@ -13803,6 +14016,8 @@
                 <a:solidFill>
                   <a:srgbClr val="0070C0"/>
                 </a:solidFill>
+                <a:latin typeface="Calibri" panose="020F0502020204030204" pitchFamily="34" charset="0"/>
+                <a:cs typeface="Calibri" panose="020F0502020204030204" pitchFamily="34" charset="0"/>
               </a:rPr>
               <a:t>Accept H</a:t>
             </a:r>
@@ -13811,6 +14026,8 @@
                 <a:solidFill>
                   <a:srgbClr val="0070C0"/>
                 </a:solidFill>
+                <a:latin typeface="Calibri" panose="020F0502020204030204" pitchFamily="34" charset="0"/>
+                <a:cs typeface="Calibri" panose="020F0502020204030204" pitchFamily="34" charset="0"/>
               </a:rPr>
               <a:t>0</a:t>
             </a:r>
@@ -13850,6 +14067,8 @@
                 <a:solidFill>
                   <a:srgbClr val="0070C0"/>
                 </a:solidFill>
+                <a:latin typeface="Calibri" panose="020F0502020204030204" pitchFamily="34" charset="0"/>
+                <a:cs typeface="Calibri" panose="020F0502020204030204" pitchFamily="34" charset="0"/>
               </a:rPr>
               <a:t>Critical Value</a:t>
             </a:r>
@@ -13898,7 +14117,10 @@
           <a:lstStyle/>
           <a:p>
             <a:pPr algn="ctr"/>
-            <a:endParaRPr lang="en-US"/>
+            <a:endParaRPr lang="en-US">
+              <a:latin typeface="Calibri" panose="020F0502020204030204" pitchFamily="34" charset="0"/>
+              <a:cs typeface="Calibri" panose="020F0502020204030204" pitchFamily="34" charset="0"/>
+            </a:endParaRPr>
           </a:p>
         </p:txBody>
       </p:sp>
@@ -13946,7 +14168,7 @@
         </p:nvSpPr>
         <p:spPr>
           <a:xfrm>
-            <a:off x="34581" y="41145"/>
+            <a:off x="28931" y="-12662"/>
             <a:ext cx="5504884" cy="523220"/>
           </a:xfrm>
           <a:prstGeom prst="rect">
@@ -13965,11 +14187,16 @@
                 <a:solidFill>
                   <a:srgbClr val="0070C0"/>
                 </a:solidFill>
+                <a:latin typeface="Calibri" panose="020F0502020204030204" pitchFamily="34" charset="0"/>
+                <a:cs typeface="Calibri" panose="020F0502020204030204" pitchFamily="34" charset="0"/>
               </a:rPr>
               <a:t>ANOVA</a:t>
             </a:r>
             <a:r>
-              <a:rPr lang="en-US" sz="2800" b="1" dirty="0"/>
+              <a:rPr lang="en-US" sz="2800" b="1" dirty="0">
+                <a:latin typeface="Calibri" panose="020F0502020204030204" pitchFamily="34" charset="0"/>
+                <a:cs typeface="Calibri" panose="020F0502020204030204" pitchFamily="34" charset="0"/>
+              </a:rPr>
               <a:t> = Analysis of Variance</a:t>
             </a:r>
           </a:p>
@@ -14025,7 +14252,7 @@
         <p:spPr>
           <a:xfrm>
             <a:off x="0" y="2119963"/>
-            <a:ext cx="2121408" cy="830997"/>
+            <a:ext cx="2121408" cy="646331"/>
           </a:xfrm>
           <a:prstGeom prst="rect">
             <a:avLst/>
@@ -14039,13 +14266,19 @@
           <a:lstStyle/>
           <a:p>
             <a:r>
-              <a:rPr lang="en-US" sz="1200" dirty="0"/>
+              <a:rPr lang="en-US" sz="1200" dirty="0">
+                <a:latin typeface="Calibri" panose="020F0502020204030204" pitchFamily="34" charset="0"/>
+                <a:cs typeface="Calibri" panose="020F0502020204030204" pitchFamily="34" charset="0"/>
+              </a:rPr>
               <a:t>Ronald Fisher 1890-1962</a:t>
             </a:r>
           </a:p>
           <a:p>
             <a:r>
-              <a:rPr lang="en-US" sz="1200" dirty="0"/>
+              <a:rPr lang="en-US" sz="1200" dirty="0">
+                <a:latin typeface="Calibri" panose="020F0502020204030204" pitchFamily="34" charset="0"/>
+                <a:cs typeface="Calibri" panose="020F0502020204030204" pitchFamily="34" charset="0"/>
+              </a:rPr>
               <a:t>British. Developed the analysis of variance </a:t>
             </a:r>
             <a:r>
@@ -14053,10 +14286,15 @@
                 <a:solidFill>
                   <a:srgbClr val="0070C0"/>
                 </a:solidFill>
+                <a:latin typeface="Calibri" panose="020F0502020204030204" pitchFamily="34" charset="0"/>
+                <a:cs typeface="Calibri" panose="020F0502020204030204" pitchFamily="34" charset="0"/>
               </a:rPr>
               <a:t>ANOVA (1925)</a:t>
             </a:r>
-            <a:endParaRPr lang="en-US" sz="1200" dirty="0"/>
+            <a:endParaRPr lang="en-US" sz="1200" dirty="0">
+              <a:latin typeface="Calibri" panose="020F0502020204030204" pitchFamily="34" charset="0"/>
+              <a:cs typeface="Calibri" panose="020F0502020204030204" pitchFamily="34" charset="0"/>
+            </a:endParaRPr>
           </a:p>
         </p:txBody>
       </p:sp>
@@ -14074,8 +14312,8 @@
         </p:nvSpPr>
         <p:spPr>
           <a:xfrm>
-            <a:off x="2227490" y="842691"/>
-            <a:ext cx="7030809" cy="954107"/>
+            <a:off x="2121408" y="775300"/>
+            <a:ext cx="7030809" cy="738664"/>
           </a:xfrm>
           <a:prstGeom prst="rect">
             <a:avLst/>
@@ -14089,7 +14327,10 @@
           <a:lstStyle/>
           <a:p>
             <a:r>
-              <a:rPr lang="en-US" dirty="0"/>
+              <a:rPr lang="en-US" dirty="0">
+                <a:latin typeface="Calibri" panose="020F0502020204030204" pitchFamily="34" charset="0"/>
+                <a:cs typeface="Calibri" panose="020F0502020204030204" pitchFamily="34" charset="0"/>
+              </a:rPr>
               <a:t>In its simplest form, </a:t>
             </a:r>
             <a:r>
@@ -14097,11 +14338,16 @@
                 <a:solidFill>
                   <a:srgbClr val="0070C0"/>
                 </a:solidFill>
+                <a:latin typeface="Calibri" panose="020F0502020204030204" pitchFamily="34" charset="0"/>
+                <a:cs typeface="Calibri" panose="020F0502020204030204" pitchFamily="34" charset="0"/>
               </a:rPr>
               <a:t>ANOVA</a:t>
             </a:r>
             <a:r>
-              <a:rPr lang="en-US" dirty="0"/>
+              <a:rPr lang="en-US" dirty="0">
+                <a:latin typeface="Calibri" panose="020F0502020204030204" pitchFamily="34" charset="0"/>
+                <a:cs typeface="Calibri" panose="020F0502020204030204" pitchFamily="34" charset="0"/>
+              </a:rPr>
               <a:t> provides a statistical test of </a:t>
             </a:r>
             <a:r>
@@ -14109,6 +14355,8 @@
                 <a:solidFill>
                   <a:srgbClr val="0070C0"/>
                 </a:solidFill>
+                <a:latin typeface="Calibri" panose="020F0502020204030204" pitchFamily="34" charset="0"/>
+                <a:cs typeface="Calibri" panose="020F0502020204030204" pitchFamily="34" charset="0"/>
               </a:rPr>
               <a:t>whether two or more </a:t>
             </a:r>
@@ -14117,6 +14365,8 @@
                 <a:solidFill>
                   <a:srgbClr val="00B050"/>
                 </a:solidFill>
+                <a:latin typeface="Calibri" panose="020F0502020204030204" pitchFamily="34" charset="0"/>
+                <a:cs typeface="Calibri" panose="020F0502020204030204" pitchFamily="34" charset="0"/>
               </a:rPr>
               <a:t>population means </a:t>
             </a:r>
@@ -14125,42 +14375,48 @@
                 <a:solidFill>
                   <a:srgbClr val="0070C0"/>
                 </a:solidFill>
+                <a:latin typeface="Calibri" panose="020F0502020204030204" pitchFamily="34" charset="0"/>
+                <a:cs typeface="Calibri" panose="020F0502020204030204" pitchFamily="34" charset="0"/>
               </a:rPr>
               <a:t>are equal</a:t>
             </a:r>
             <a:r>
-              <a:rPr lang="en-US" dirty="0"/>
-              <a:t>, and therefore </a:t>
-            </a:r>
-            <a:r>
               <a:rPr lang="en-US" dirty="0">
+                <a:latin typeface="Calibri" panose="020F0502020204030204" pitchFamily="34" charset="0"/>
+                <a:cs typeface="Calibri" panose="020F0502020204030204" pitchFamily="34" charset="0"/>
+              </a:rPr>
+              <a:t>, it </a:t>
+            </a:r>
+            <a:r>
+              <a:rPr lang="en-US" dirty="0">
                 <a:solidFill>
                   <a:srgbClr val="0070C0"/>
                 </a:solidFill>
-              </a:rPr>
-              <a:t>generalizes the t-test beyond two means.</a:t>
-            </a:r>
-            <a:endParaRPr lang="en-US" dirty="0"/>
-          </a:p>
-          <a:p>
-            <a:r>
-              <a:rPr lang="en-US" dirty="0"/>
-              <a:t>The observed variance in a particular variable is partitioned into component.</a:t>
-            </a:r>
-          </a:p>
-          <a:p>
-            <a:r>
-              <a:rPr lang="en-US" dirty="0"/>
-              <a:t>- </a:t>
+                <a:latin typeface="Calibri" panose="020F0502020204030204" pitchFamily="34" charset="0"/>
+                <a:cs typeface="Calibri" panose="020F0502020204030204" pitchFamily="34" charset="0"/>
+              </a:rPr>
+              <a:t>generalizes the t-test</a:t>
             </a:r>
             <a:r>
               <a:rPr lang="en-US" dirty="0">
+                <a:latin typeface="Calibri" panose="020F0502020204030204" pitchFamily="34" charset="0"/>
+                <a:cs typeface="Calibri" panose="020F0502020204030204" pitchFamily="34" charset="0"/>
+              </a:rPr>
+              <a:t>. The observed variance in a particular variable is partitioned into components - </a:t>
+            </a:r>
+            <a:r>
+              <a:rPr lang="en-US" dirty="0">
+                <a:latin typeface="Calibri" panose="020F0502020204030204" pitchFamily="34" charset="0"/>
+                <a:cs typeface="Calibri" panose="020F0502020204030204" pitchFamily="34" charset="0"/>
                 <a:hlinkClick r:id="rId3"/>
               </a:rPr>
               <a:t>https://en.wikipedia.org/wiki/Analysis_of_variance</a:t>
             </a:r>
             <a:r>
-              <a:rPr lang="en-US" dirty="0"/>
+              <a:rPr lang="en-US" dirty="0">
+                <a:latin typeface="Calibri" panose="020F0502020204030204" pitchFamily="34" charset="0"/>
+                <a:cs typeface="Calibri" panose="020F0502020204030204" pitchFamily="34" charset="0"/>
+              </a:rPr>
               <a:t> </a:t>
             </a:r>
           </a:p>
@@ -14216,8 +14472,8 @@
         </p:nvSpPr>
         <p:spPr>
           <a:xfrm>
-            <a:off x="0" y="3902363"/>
-            <a:ext cx="8540231" cy="2893100"/>
+            <a:off x="1" y="3902363"/>
+            <a:ext cx="7772400" cy="2893100"/>
           </a:xfrm>
           <a:prstGeom prst="rect">
             <a:avLst/>
@@ -14235,27 +14491,44 @@
                 <a:solidFill>
                   <a:srgbClr val="0070C0"/>
                 </a:solidFill>
+                <a:latin typeface="Calibri" panose="020F0502020204030204" pitchFamily="34" charset="0"/>
+                <a:cs typeface="Calibri" panose="020F0502020204030204" pitchFamily="34" charset="0"/>
               </a:rPr>
               <a:t>ANOVA</a:t>
             </a:r>
             <a:r>
-              <a:rPr lang="en-US" dirty="0"/>
+              <a:rPr lang="en-US" dirty="0">
+                <a:latin typeface="Calibri" panose="020F0502020204030204" pitchFamily="34" charset="0"/>
+                <a:cs typeface="Calibri" panose="020F0502020204030204" pitchFamily="34" charset="0"/>
+              </a:rPr>
               <a:t> is the synthesis of several ideas and it is used for multiple purposes.</a:t>
             </a:r>
             <a:br>
-              <a:rPr lang="en-US" dirty="0"/>
+              <a:rPr lang="en-US" dirty="0">
+                <a:latin typeface="Calibri" panose="020F0502020204030204" pitchFamily="34" charset="0"/>
+                <a:cs typeface="Calibri" panose="020F0502020204030204" pitchFamily="34" charset="0"/>
+              </a:rPr>
             </a:br>
             <a:r>
-              <a:rPr lang="en-US" dirty="0"/>
+              <a:rPr lang="en-US" dirty="0">
+                <a:latin typeface="Calibri" panose="020F0502020204030204" pitchFamily="34" charset="0"/>
+                <a:cs typeface="Calibri" panose="020F0502020204030204" pitchFamily="34" charset="0"/>
+              </a:rPr>
               <a:t>As a consequence, it is difficult to define concisely or precisely.</a:t>
             </a:r>
           </a:p>
           <a:p>
-            <a:endParaRPr lang="en-US" dirty="0"/>
+            <a:endParaRPr lang="en-US" dirty="0">
+              <a:latin typeface="Calibri" panose="020F0502020204030204" pitchFamily="34" charset="0"/>
+              <a:cs typeface="Calibri" panose="020F0502020204030204" pitchFamily="34" charset="0"/>
+            </a:endParaRPr>
           </a:p>
           <a:p>
             <a:r>
-              <a:rPr lang="en-US" dirty="0"/>
+              <a:rPr lang="en-US" dirty="0">
+                <a:latin typeface="Calibri" panose="020F0502020204030204" pitchFamily="34" charset="0"/>
+                <a:cs typeface="Calibri" panose="020F0502020204030204" pitchFamily="34" charset="0"/>
+              </a:rPr>
               <a:t>"Classical" </a:t>
             </a:r>
             <a:r>
@@ -14263,11 +14536,16 @@
                 <a:solidFill>
                   <a:srgbClr val="0070C0"/>
                 </a:solidFill>
+                <a:latin typeface="Calibri" panose="020F0502020204030204" pitchFamily="34" charset="0"/>
+                <a:cs typeface="Calibri" panose="020F0502020204030204" pitchFamily="34" charset="0"/>
               </a:rPr>
               <a:t>ANOVA</a:t>
             </a:r>
             <a:r>
-              <a:rPr lang="en-US" dirty="0"/>
+              <a:rPr lang="en-US" dirty="0">
+                <a:latin typeface="Calibri" panose="020F0502020204030204" pitchFamily="34" charset="0"/>
+                <a:cs typeface="Calibri" panose="020F0502020204030204" pitchFamily="34" charset="0"/>
+              </a:rPr>
               <a:t> for balanced data does three things at once:</a:t>
             </a:r>
           </a:p>
@@ -14277,14 +14555,23 @@
               <a:buAutoNum type="arabicPeriod"/>
             </a:pPr>
             <a:r>
-              <a:rPr lang="en-US" dirty="0"/>
+              <a:rPr lang="en-US" dirty="0">
+                <a:latin typeface="Calibri" panose="020F0502020204030204" pitchFamily="34" charset="0"/>
+                <a:cs typeface="Calibri" panose="020F0502020204030204" pitchFamily="34" charset="0"/>
+              </a:rPr>
               <a:t>Uses additive data decomposition for exploratory data analysis. </a:t>
             </a:r>
             <a:br>
-              <a:rPr lang="en-US" dirty="0"/>
+              <a:rPr lang="en-US" dirty="0">
+                <a:latin typeface="Calibri" panose="020F0502020204030204" pitchFamily="34" charset="0"/>
+                <a:cs typeface="Calibri" panose="020F0502020204030204" pitchFamily="34" charset="0"/>
+              </a:rPr>
             </a:br>
             <a:r>
-              <a:rPr lang="en-US" dirty="0"/>
+              <a:rPr lang="en-US" dirty="0">
+                <a:latin typeface="Calibri" panose="020F0502020204030204" pitchFamily="34" charset="0"/>
+                <a:cs typeface="Calibri" panose="020F0502020204030204" pitchFamily="34" charset="0"/>
+              </a:rPr>
               <a:t>Uses sums of squares to indicate the variance of each component of the decomposition.</a:t>
             </a:r>
           </a:p>
@@ -14294,7 +14581,10 @@
               <a:buAutoNum type="arabicPeriod"/>
             </a:pPr>
             <a:r>
-              <a:rPr lang="en-US" dirty="0"/>
+              <a:rPr lang="en-US" dirty="0">
+                <a:latin typeface="Calibri" panose="020F0502020204030204" pitchFamily="34" charset="0"/>
+                <a:cs typeface="Calibri" panose="020F0502020204030204" pitchFamily="34" charset="0"/>
+              </a:rPr>
               <a:t>Comparisons of mean squares, along with an F-test ... allow testing of a nested sequence of models.</a:t>
             </a:r>
           </a:p>
@@ -14304,7 +14594,10 @@
               <a:buAutoNum type="arabicPeriod"/>
             </a:pPr>
             <a:r>
-              <a:rPr lang="en-US" dirty="0"/>
+              <a:rPr lang="en-US" dirty="0">
+                <a:latin typeface="Calibri" panose="020F0502020204030204" pitchFamily="34" charset="0"/>
+                <a:cs typeface="Calibri" panose="020F0502020204030204" pitchFamily="34" charset="0"/>
+              </a:rPr>
               <a:t>Closely related to the </a:t>
             </a:r>
             <a:r>
@@ -14312,20 +14605,31 @@
                 <a:solidFill>
                   <a:srgbClr val="0070C0"/>
                 </a:solidFill>
+                <a:latin typeface="Calibri" panose="020F0502020204030204" pitchFamily="34" charset="0"/>
+                <a:cs typeface="Calibri" panose="020F0502020204030204" pitchFamily="34" charset="0"/>
               </a:rPr>
               <a:t>ANOVA</a:t>
             </a:r>
             <a:r>
-              <a:rPr lang="en-US" dirty="0"/>
+              <a:rPr lang="en-US" dirty="0">
+                <a:latin typeface="Calibri" panose="020F0502020204030204" pitchFamily="34" charset="0"/>
+                <a:cs typeface="Calibri" panose="020F0502020204030204" pitchFamily="34" charset="0"/>
+              </a:rPr>
               <a:t> is a linear model fit with coefficient estimates and standard errors.</a:t>
             </a:r>
           </a:p>
           <a:p>
-            <a:endParaRPr lang="en-US" dirty="0"/>
+            <a:endParaRPr lang="en-US" dirty="0">
+              <a:latin typeface="Calibri" panose="020F0502020204030204" pitchFamily="34" charset="0"/>
+              <a:cs typeface="Calibri" panose="020F0502020204030204" pitchFamily="34" charset="0"/>
+            </a:endParaRPr>
           </a:p>
           <a:p>
             <a:r>
-              <a:rPr lang="en-US" dirty="0"/>
+              <a:rPr lang="en-US" dirty="0">
+                <a:latin typeface="Calibri" panose="020F0502020204030204" pitchFamily="34" charset="0"/>
+                <a:cs typeface="Calibri" panose="020F0502020204030204" pitchFamily="34" charset="0"/>
+              </a:rPr>
               <a:t>Additionally, </a:t>
             </a:r>
             <a:r>
@@ -14333,11 +14637,16 @@
                 <a:solidFill>
                   <a:srgbClr val="0070C0"/>
                 </a:solidFill>
+                <a:latin typeface="Calibri" panose="020F0502020204030204" pitchFamily="34" charset="0"/>
+                <a:cs typeface="Calibri" panose="020F0502020204030204" pitchFamily="34" charset="0"/>
               </a:rPr>
               <a:t>ANOVA </a:t>
             </a:r>
             <a:r>
-              <a:rPr lang="en-US" dirty="0"/>
+              <a:rPr lang="en-US" dirty="0">
+                <a:latin typeface="Calibri" panose="020F0502020204030204" pitchFamily="34" charset="0"/>
+                <a:cs typeface="Calibri" panose="020F0502020204030204" pitchFamily="34" charset="0"/>
+              </a:rPr>
               <a:t>:</a:t>
             </a:r>
           </a:p>
@@ -14347,7 +14656,10 @@
               <a:buAutoNum type="arabicPeriod"/>
             </a:pPr>
             <a:r>
-              <a:rPr lang="en-US" dirty="0"/>
+              <a:rPr lang="en-US" dirty="0">
+                <a:latin typeface="Calibri" panose="020F0502020204030204" pitchFamily="34" charset="0"/>
+                <a:cs typeface="Calibri" panose="020F0502020204030204" pitchFamily="34" charset="0"/>
+              </a:rPr>
               <a:t>is computationally elegant and relatively robust against violations of its assumptions.</a:t>
             </a:r>
           </a:p>
@@ -14357,7 +14669,10 @@
               <a:buAutoNum type="arabicPeriod"/>
             </a:pPr>
             <a:r>
-              <a:rPr lang="en-US" dirty="0"/>
+              <a:rPr lang="en-US" dirty="0">
+                <a:latin typeface="Calibri" panose="020F0502020204030204" pitchFamily="34" charset="0"/>
+                <a:cs typeface="Calibri" panose="020F0502020204030204" pitchFamily="34" charset="0"/>
+              </a:rPr>
               <a:t>provides strong (multiple sample comparison) statistical analysis.</a:t>
             </a:r>
           </a:p>
@@ -14367,7 +14682,10 @@
               <a:buAutoNum type="arabicPeriod"/>
             </a:pPr>
             <a:r>
-              <a:rPr lang="en-US" dirty="0"/>
+              <a:rPr lang="en-US" dirty="0">
+                <a:latin typeface="Calibri" panose="020F0502020204030204" pitchFamily="34" charset="0"/>
+                <a:cs typeface="Calibri" panose="020F0502020204030204" pitchFamily="34" charset="0"/>
+              </a:rPr>
               <a:t>has been adapted to the analysis of a variety of experimental designs.</a:t>
             </a:r>
           </a:p>
@@ -14400,7 +14718,7 @@
         </p:blipFill>
         <p:spPr>
           <a:xfrm>
-            <a:off x="5919244" y="117733"/>
+            <a:off x="6810838" y="58134"/>
             <a:ext cx="1749230" cy="639010"/>
           </a:xfrm>
           <a:prstGeom prst="rect">
@@ -14408,115 +14726,151 @@
           </a:prstGeom>
         </p:spPr>
       </p:pic>
-      <p:sp>
-        <p:nvSpPr>
-          <p:cNvPr id="5" name="TextBox 4">
+      <p:grpSp>
+        <p:nvGrpSpPr>
+          <p:cNvPr id="13" name="Group 12">
             <a:extLst>
               <a:ext uri="{FF2B5EF4-FFF2-40B4-BE49-F238E27FC236}">
-                <a16:creationId xmlns:a16="http://schemas.microsoft.com/office/drawing/2014/main" id="{C56DDD30-6F6F-F44C-A3E0-4232C8EDB313}"/>
+                <a16:creationId xmlns:a16="http://schemas.microsoft.com/office/drawing/2014/main" id="{8C5F22B8-8427-C901-23CF-F315EAE6931E}"/>
               </a:ext>
             </a:extLst>
           </p:cNvPr>
-          <p:cNvSpPr txBox="1"/>
+          <p:cNvGrpSpPr/>
           <p:nvPr/>
-        </p:nvSpPr>
-        <p:spPr>
+        </p:nvGrpSpPr>
+        <p:grpSpPr>
           <a:xfrm>
-            <a:off x="7450469" y="3599628"/>
-            <a:ext cx="1470991" cy="1169551"/>
+            <a:off x="7360830" y="2976855"/>
+            <a:ext cx="1557197" cy="1557197"/>
+            <a:chOff x="7437217" y="3564357"/>
+            <a:chExt cx="1557197" cy="1557197"/>
           </a:xfrm>
-          <a:prstGeom prst="rect">
-            <a:avLst/>
-          </a:prstGeom>
-          <a:noFill/>
-        </p:spPr>
-        <p:txBody>
-          <a:bodyPr wrap="square" rtlCol="0">
-            <a:spAutoFit/>
-          </a:bodyPr>
-          <a:lstStyle/>
-          <a:p>
-            <a:pPr algn="ctr"/>
-            <a:r>
-              <a:rPr lang="en-US" dirty="0"/>
-              <a:t>Variance Between</a:t>
-            </a:r>
-          </a:p>
-          <a:p>
-            <a:pPr algn="ctr"/>
-            <a:r>
-              <a:rPr lang="en-US" dirty="0"/>
-              <a:t>--------------------</a:t>
-            </a:r>
-          </a:p>
-          <a:p>
-            <a:pPr algn="ctr"/>
-            <a:r>
-              <a:rPr lang="en-US" dirty="0"/>
-              <a:t>Variance</a:t>
-            </a:r>
-          </a:p>
-          <a:p>
-            <a:pPr algn="ctr"/>
-            <a:r>
-              <a:rPr lang="en-US" dirty="0"/>
-              <a:t>Within</a:t>
-            </a:r>
-          </a:p>
-        </p:txBody>
-      </p:sp>
-      <p:sp>
-        <p:nvSpPr>
-          <p:cNvPr id="7" name="Oval 6">
-            <a:extLst>
-              <a:ext uri="{FF2B5EF4-FFF2-40B4-BE49-F238E27FC236}">
-                <a16:creationId xmlns:a16="http://schemas.microsoft.com/office/drawing/2014/main" id="{E8932007-90EA-9246-8DF1-F535C57E65EC}"/>
-              </a:ext>
-            </a:extLst>
-          </p:cNvPr>
-          <p:cNvSpPr/>
-          <p:nvPr/>
-        </p:nvSpPr>
-        <p:spPr>
-          <a:xfrm>
-            <a:off x="7437217" y="3357529"/>
-            <a:ext cx="1557197" cy="1557197"/>
-          </a:xfrm>
-          <a:prstGeom prst="ellipse">
-            <a:avLst/>
-          </a:prstGeom>
-          <a:solidFill>
-            <a:schemeClr val="accent1">
-              <a:alpha val="9000"/>
-            </a:schemeClr>
-          </a:solidFill>
-          <a:ln w="38100"/>
-        </p:spPr>
-        <p:style>
-          <a:lnRef idx="2">
-            <a:schemeClr val="accent1">
-              <a:shade val="50000"/>
-            </a:schemeClr>
-          </a:lnRef>
-          <a:fillRef idx="1">
-            <a:schemeClr val="accent1"/>
-          </a:fillRef>
-          <a:effectRef idx="0">
-            <a:schemeClr val="accent1"/>
-          </a:effectRef>
-          <a:fontRef idx="minor">
-            <a:schemeClr val="lt1"/>
-          </a:fontRef>
-        </p:style>
-        <p:txBody>
-          <a:bodyPr rtlCol="0" anchor="ctr"/>
-          <a:lstStyle/>
-          <a:p>
-            <a:pPr algn="ctr"/>
-            <a:endParaRPr lang="en-US"/>
-          </a:p>
-        </p:txBody>
-      </p:sp>
+        </p:grpSpPr>
+        <p:sp>
+          <p:nvSpPr>
+            <p:cNvPr id="5" name="TextBox 4">
+              <a:extLst>
+                <a:ext uri="{FF2B5EF4-FFF2-40B4-BE49-F238E27FC236}">
+                  <a16:creationId xmlns:a16="http://schemas.microsoft.com/office/drawing/2014/main" id="{C56DDD30-6F6F-F44C-A3E0-4232C8EDB313}"/>
+                </a:ext>
+              </a:extLst>
+            </p:cNvPr>
+            <p:cNvSpPr txBox="1"/>
+            <p:nvPr/>
+          </p:nvSpPr>
+          <p:spPr>
+            <a:xfrm>
+              <a:off x="7450469" y="3806456"/>
+              <a:ext cx="1470991" cy="1169551"/>
+            </a:xfrm>
+            <a:prstGeom prst="rect">
+              <a:avLst/>
+            </a:prstGeom>
+            <a:noFill/>
+          </p:spPr>
+          <p:txBody>
+            <a:bodyPr wrap="square" rtlCol="0">
+              <a:spAutoFit/>
+            </a:bodyPr>
+            <a:lstStyle/>
+            <a:p>
+              <a:pPr algn="ctr"/>
+              <a:r>
+                <a:rPr lang="en-US" dirty="0">
+                  <a:latin typeface="Calibri" panose="020F0502020204030204" pitchFamily="34" charset="0"/>
+                  <a:cs typeface="Calibri" panose="020F0502020204030204" pitchFamily="34" charset="0"/>
+                </a:rPr>
+                <a:t>Variance Between</a:t>
+              </a:r>
+            </a:p>
+            <a:p>
+              <a:pPr algn="ctr"/>
+              <a:r>
+                <a:rPr lang="en-US" dirty="0">
+                  <a:latin typeface="Calibri" panose="020F0502020204030204" pitchFamily="34" charset="0"/>
+                  <a:cs typeface="Calibri" panose="020F0502020204030204" pitchFamily="34" charset="0"/>
+                </a:rPr>
+                <a:t>--------------------</a:t>
+              </a:r>
+            </a:p>
+            <a:p>
+              <a:pPr algn="ctr"/>
+              <a:r>
+                <a:rPr lang="en-US" dirty="0">
+                  <a:latin typeface="Calibri" panose="020F0502020204030204" pitchFamily="34" charset="0"/>
+                  <a:cs typeface="Calibri" panose="020F0502020204030204" pitchFamily="34" charset="0"/>
+                </a:rPr>
+                <a:t>Variance</a:t>
+              </a:r>
+            </a:p>
+            <a:p>
+              <a:pPr algn="ctr"/>
+              <a:r>
+                <a:rPr lang="en-US" dirty="0">
+                  <a:latin typeface="Calibri" panose="020F0502020204030204" pitchFamily="34" charset="0"/>
+                  <a:cs typeface="Calibri" panose="020F0502020204030204" pitchFamily="34" charset="0"/>
+                </a:rPr>
+                <a:t>Within</a:t>
+              </a:r>
+            </a:p>
+          </p:txBody>
+        </p:sp>
+        <p:sp>
+          <p:nvSpPr>
+            <p:cNvPr id="7" name="Oval 6">
+              <a:extLst>
+                <a:ext uri="{FF2B5EF4-FFF2-40B4-BE49-F238E27FC236}">
+                  <a16:creationId xmlns:a16="http://schemas.microsoft.com/office/drawing/2014/main" id="{E8932007-90EA-9246-8DF1-F535C57E65EC}"/>
+                </a:ext>
+              </a:extLst>
+            </p:cNvPr>
+            <p:cNvSpPr/>
+            <p:nvPr/>
+          </p:nvSpPr>
+          <p:spPr>
+            <a:xfrm>
+              <a:off x="7437217" y="3564357"/>
+              <a:ext cx="1557197" cy="1557197"/>
+            </a:xfrm>
+            <a:prstGeom prst="ellipse">
+              <a:avLst/>
+            </a:prstGeom>
+            <a:solidFill>
+              <a:schemeClr val="accent1">
+                <a:alpha val="9000"/>
+              </a:schemeClr>
+            </a:solidFill>
+            <a:ln w="38100"/>
+          </p:spPr>
+          <p:style>
+            <a:lnRef idx="2">
+              <a:schemeClr val="accent1">
+                <a:shade val="50000"/>
+              </a:schemeClr>
+            </a:lnRef>
+            <a:fillRef idx="1">
+              <a:schemeClr val="accent1"/>
+            </a:fillRef>
+            <a:effectRef idx="0">
+              <a:schemeClr val="accent1"/>
+            </a:effectRef>
+            <a:fontRef idx="minor">
+              <a:schemeClr val="lt1"/>
+            </a:fontRef>
+          </p:style>
+          <p:txBody>
+            <a:bodyPr rtlCol="0" anchor="ctr"/>
+            <a:lstStyle/>
+            <a:p>
+              <a:pPr algn="ctr"/>
+              <a:endParaRPr lang="en-US">
+                <a:latin typeface="Calibri" panose="020F0502020204030204" pitchFamily="34" charset="0"/>
+                <a:cs typeface="Calibri" panose="020F0502020204030204" pitchFamily="34" charset="0"/>
+              </a:endParaRPr>
+            </a:p>
+          </p:txBody>
+        </p:sp>
+      </p:grpSp>
       <p:sp>
         <p:nvSpPr>
           <p:cNvPr id="9" name="TextBox 8">
@@ -14531,7 +14885,7 @@
         </p:nvSpPr>
         <p:spPr>
           <a:xfrm>
-            <a:off x="2227489" y="1937845"/>
+            <a:off x="2121408" y="1592120"/>
             <a:ext cx="7030809" cy="523220"/>
           </a:xfrm>
           <a:prstGeom prst="rect">
@@ -14550,17 +14904,25 @@
                 <a:solidFill>
                   <a:srgbClr val="0070C0"/>
                 </a:solidFill>
+                <a:latin typeface="Calibri" panose="020F0502020204030204" pitchFamily="34" charset="0"/>
+                <a:cs typeface="Calibri" panose="020F0502020204030204" pitchFamily="34" charset="0"/>
               </a:rPr>
               <a:t>One-way ANOVA</a:t>
             </a:r>
             <a:r>
-              <a:rPr lang="en-US" dirty="0"/>
+              <a:rPr lang="en-US" dirty="0">
+                <a:latin typeface="Calibri" panose="020F0502020204030204" pitchFamily="34" charset="0"/>
+                <a:cs typeface="Calibri" panose="020F0502020204030204" pitchFamily="34" charset="0"/>
+              </a:rPr>
               <a:t> - compare means of two or more samples (using the F distribution). </a:t>
             </a:r>
           </a:p>
           <a:p>
             <a:r>
-              <a:rPr lang="en-US" dirty="0"/>
+              <a:rPr lang="en-US" dirty="0">
+                <a:latin typeface="Calibri" panose="020F0502020204030204" pitchFamily="34" charset="0"/>
+                <a:cs typeface="Calibri" panose="020F0502020204030204" pitchFamily="34" charset="0"/>
+              </a:rPr>
               <a:t>Response data "Y" (numerical) and input data "X" (numerical or categorical)</a:t>
             </a:r>
           </a:p>
@@ -14580,8 +14942,8 @@
         </p:nvSpPr>
         <p:spPr>
           <a:xfrm>
-            <a:off x="2229982" y="2499554"/>
-            <a:ext cx="7048500" cy="954107"/>
+            <a:off x="2121408" y="2148440"/>
+            <a:ext cx="7121299" cy="954107"/>
           </a:xfrm>
           <a:prstGeom prst="rect">
             <a:avLst/>
@@ -14599,12 +14961,35 @@
                 <a:solidFill>
                   <a:srgbClr val="0070C0"/>
                 </a:solidFill>
+                <a:latin typeface="Calibri" panose="020F0502020204030204" pitchFamily="34" charset="0"/>
+                <a:cs typeface="Calibri" panose="020F0502020204030204" pitchFamily="34" charset="0"/>
               </a:rPr>
               <a:t>Two-way ANOVA </a:t>
             </a:r>
             <a:r>
-              <a:rPr lang="en-US" dirty="0"/>
-              <a:t>is an extension of the one-way ANOVA that examines the influence of two different categorical independent variables (X1, X2) on one continuous dependent variable "Y". Goal - assess the main effect of each independent variable and assess if there is any interaction between them.</a:t>
+              <a:rPr lang="en-US" dirty="0">
+                <a:latin typeface="Calibri" panose="020F0502020204030204" pitchFamily="34" charset="0"/>
+                <a:cs typeface="Calibri" panose="020F0502020204030204" pitchFamily="34" charset="0"/>
+              </a:rPr>
+              <a:t>is an extension of the one-way ANOVA that examines the influence of two different categorical independent variables (X1, X2) on one continuous dependent variable "Y". </a:t>
+            </a:r>
+          </a:p>
+          <a:p>
+            <a:r>
+              <a:rPr lang="en-US" dirty="0">
+                <a:latin typeface="Calibri" panose="020F0502020204030204" pitchFamily="34" charset="0"/>
+                <a:cs typeface="Calibri" panose="020F0502020204030204" pitchFamily="34" charset="0"/>
+              </a:rPr>
+              <a:t>The goal is to assess the main effect of each independent variable</a:t>
+            </a:r>
+          </a:p>
+          <a:p>
+            <a:r>
+              <a:rPr lang="en-US" dirty="0">
+                <a:latin typeface="Calibri" panose="020F0502020204030204" pitchFamily="34" charset="0"/>
+                <a:cs typeface="Calibri" panose="020F0502020204030204" pitchFamily="34" charset="0"/>
+              </a:rPr>
+              <a:t>and to assess if there is any interaction between them.</a:t>
             </a:r>
           </a:p>
         </p:txBody>
@@ -14653,13 +15038,23 @@
         </p:nvSpPr>
         <p:spPr>
           <a:xfrm>
-            <a:off x="1048512" y="963168"/>
+            <a:off x="3243072" y="865197"/>
             <a:ext cx="5705856" cy="5678478"/>
           </a:xfrm>
           <a:prstGeom prst="rect">
             <a:avLst/>
           </a:prstGeom>
-          <a:noFill/>
+          <a:solidFill>
+            <a:schemeClr val="accent4">
+              <a:lumMod val="20000"/>
+              <a:lumOff val="80000"/>
+            </a:schemeClr>
+          </a:solidFill>
+          <a:ln>
+            <a:solidFill>
+              <a:srgbClr val="FF0000"/>
+            </a:solidFill>
+          </a:ln>
         </p:spPr>
         <p:txBody>
           <a:bodyPr wrap="square" rtlCol="0">
@@ -15716,7 +16111,7 @@
         </p:nvSpPr>
         <p:spPr>
           <a:xfrm>
-            <a:off x="95541" y="126489"/>
+            <a:off x="0" y="0"/>
             <a:ext cx="5504884" cy="523220"/>
           </a:xfrm>
           <a:prstGeom prst="rect">
@@ -15735,11 +16130,16 @@
                 <a:solidFill>
                   <a:srgbClr val="0070C0"/>
                 </a:solidFill>
+                <a:latin typeface="Calibri" panose="020F0502020204030204" pitchFamily="34" charset="0"/>
+                <a:cs typeface="Calibri" panose="020F0502020204030204" pitchFamily="34" charset="0"/>
               </a:rPr>
               <a:t>ANOVA</a:t>
             </a:r>
             <a:r>
-              <a:rPr lang="en-US" sz="2800" b="1" dirty="0"/>
+              <a:rPr lang="en-US" sz="2800" b="1" dirty="0">
+                <a:latin typeface="Calibri" panose="020F0502020204030204" pitchFamily="34" charset="0"/>
+                <a:cs typeface="Calibri" panose="020F0502020204030204" pitchFamily="34" charset="0"/>
+              </a:rPr>
               <a:t> = Analysis of Variance</a:t>
             </a:r>
           </a:p>
@@ -15789,13 +16189,23 @@
         </p:nvSpPr>
         <p:spPr>
           <a:xfrm>
-            <a:off x="190500" y="241300"/>
-            <a:ext cx="5245100" cy="3108543"/>
+            <a:off x="593271" y="1237501"/>
+            <a:ext cx="2803072" cy="2031325"/>
           </a:xfrm>
           <a:prstGeom prst="rect">
             <a:avLst/>
           </a:prstGeom>
-          <a:noFill/>
+          <a:solidFill>
+            <a:schemeClr val="accent4">
+              <a:lumMod val="20000"/>
+              <a:lumOff val="80000"/>
+            </a:schemeClr>
+          </a:solidFill>
+          <a:ln>
+            <a:solidFill>
+              <a:srgbClr val="FF0000"/>
+            </a:solidFill>
+          </a:ln>
         </p:spPr>
         <p:txBody>
           <a:bodyPr wrap="square" rtlCol="0">
@@ -15804,28 +16214,13 @@
           <a:lstStyle/>
           <a:p>
             <a:r>
-              <a:rPr lang="en-US" sz="2800" b="1" dirty="0"/>
-              <a:t>ANOVA – Multilevel model</a:t>
-            </a:r>
-          </a:p>
-          <a:p>
-            <a:endParaRPr lang="en-US" dirty="0"/>
-          </a:p>
-          <a:p>
-            <a:r>
-              <a:rPr lang="en-US" dirty="0">
-                <a:hlinkClick r:id="rId2"/>
-              </a:rPr>
-              <a:t>https://en.wikipedia.org/wiki/Multilevel_model</a:t>
-            </a:r>
-            <a:endParaRPr lang="en-US" dirty="0"/>
-          </a:p>
-          <a:p>
-            <a:endParaRPr lang="en-US" dirty="0"/>
-          </a:p>
-          <a:p>
-            <a:r>
-              <a:rPr lang="en-US" dirty="0"/>
+              <a:rPr lang="en-US" b="1" dirty="0">
+                <a:solidFill>
+                  <a:srgbClr val="00B050"/>
+                </a:solidFill>
+                <a:latin typeface="Calibri" panose="020F0502020204030204" pitchFamily="34" charset="0"/>
+                <a:cs typeface="Calibri" panose="020F0502020204030204" pitchFamily="34" charset="0"/>
+              </a:rPr>
               <a:t>Multilevel models, a.k.a.:</a:t>
             </a:r>
           </a:p>
@@ -15835,7 +16230,10 @@
               <a:buChar char="•"/>
             </a:pPr>
             <a:r>
-              <a:rPr lang="en-US" dirty="0"/>
+              <a:rPr lang="en-US" dirty="0">
+                <a:latin typeface="Calibri" panose="020F0502020204030204" pitchFamily="34" charset="0"/>
+                <a:cs typeface="Calibri" panose="020F0502020204030204" pitchFamily="34" charset="0"/>
+              </a:rPr>
               <a:t>hierarchical linear models</a:t>
             </a:r>
           </a:p>
@@ -15845,7 +16243,10 @@
               <a:buChar char="•"/>
             </a:pPr>
             <a:r>
-              <a:rPr lang="en-US" dirty="0"/>
+              <a:rPr lang="en-US" dirty="0">
+                <a:latin typeface="Calibri" panose="020F0502020204030204" pitchFamily="34" charset="0"/>
+                <a:cs typeface="Calibri" panose="020F0502020204030204" pitchFamily="34" charset="0"/>
+              </a:rPr>
               <a:t>linear mixed-effect model</a:t>
             </a:r>
           </a:p>
@@ -15855,7 +16256,10 @@
               <a:buChar char="•"/>
             </a:pPr>
             <a:r>
-              <a:rPr lang="en-US" dirty="0"/>
+              <a:rPr lang="en-US" dirty="0">
+                <a:latin typeface="Calibri" panose="020F0502020204030204" pitchFamily="34" charset="0"/>
+                <a:cs typeface="Calibri" panose="020F0502020204030204" pitchFamily="34" charset="0"/>
+              </a:rPr>
               <a:t>mixed models</a:t>
             </a:r>
           </a:p>
@@ -15865,7 +16269,10 @@
               <a:buChar char="•"/>
             </a:pPr>
             <a:r>
-              <a:rPr lang="en-US" dirty="0"/>
+              <a:rPr lang="en-US" dirty="0">
+                <a:latin typeface="Calibri" panose="020F0502020204030204" pitchFamily="34" charset="0"/>
+                <a:cs typeface="Calibri" panose="020F0502020204030204" pitchFamily="34" charset="0"/>
+              </a:rPr>
               <a:t>nested data models</a:t>
             </a:r>
           </a:p>
@@ -15875,7 +16282,10 @@
               <a:buChar char="•"/>
             </a:pPr>
             <a:r>
-              <a:rPr lang="en-US" dirty="0"/>
+              <a:rPr lang="en-US" dirty="0">
+                <a:latin typeface="Calibri" panose="020F0502020204030204" pitchFamily="34" charset="0"/>
+                <a:cs typeface="Calibri" panose="020F0502020204030204" pitchFamily="34" charset="0"/>
+              </a:rPr>
               <a:t>random coefficient</a:t>
             </a:r>
           </a:p>
@@ -15885,7 +16295,10 @@
               <a:buChar char="•"/>
             </a:pPr>
             <a:r>
-              <a:rPr lang="en-US" dirty="0"/>
+              <a:rPr lang="en-US" dirty="0">
+                <a:latin typeface="Calibri" panose="020F0502020204030204" pitchFamily="34" charset="0"/>
+                <a:cs typeface="Calibri" panose="020F0502020204030204" pitchFamily="34" charset="0"/>
+              </a:rPr>
               <a:t>random-effects models</a:t>
             </a:r>
           </a:p>
@@ -15895,7 +16308,10 @@
               <a:buChar char="•"/>
             </a:pPr>
             <a:r>
-              <a:rPr lang="en-US" dirty="0"/>
+              <a:rPr lang="en-US" dirty="0">
+                <a:latin typeface="Calibri" panose="020F0502020204030204" pitchFamily="34" charset="0"/>
+                <a:cs typeface="Calibri" panose="020F0502020204030204" pitchFamily="34" charset="0"/>
+              </a:rPr>
               <a:t>random parameter models</a:t>
             </a:r>
           </a:p>
@@ -15905,7 +16321,10 @@
               <a:buChar char="•"/>
             </a:pPr>
             <a:r>
-              <a:rPr lang="en-US" dirty="0"/>
+              <a:rPr lang="en-US" dirty="0">
+                <a:latin typeface="Calibri" panose="020F0502020204030204" pitchFamily="34" charset="0"/>
+                <a:cs typeface="Calibri" panose="020F0502020204030204" pitchFamily="34" charset="0"/>
+              </a:rPr>
               <a:t>split-plot designs</a:t>
             </a:r>
           </a:p>
@@ -15926,7 +16345,7 @@
           <p:nvPr/>
         </p:nvPicPr>
         <p:blipFill>
-          <a:blip r:embed="rId3" cstate="email">
+          <a:blip r:embed="rId2" cstate="email">
             <a:extLst>
               <a:ext uri="{28A0092B-C50C-407E-A947-70E740481C1C}">
                 <a14:useLocalDpi xmlns:a14="http://schemas.microsoft.com/office/drawing/2010/main"/>
@@ -15961,13 +16380,23 @@
         </p:nvSpPr>
         <p:spPr>
           <a:xfrm>
-            <a:off x="0" y="4465982"/>
-            <a:ext cx="11047343" cy="2246769"/>
+            <a:off x="1994807" y="4629268"/>
+            <a:ext cx="7935686" cy="1815882"/>
           </a:xfrm>
           <a:prstGeom prst="rect">
             <a:avLst/>
           </a:prstGeom>
-          <a:noFill/>
+          <a:solidFill>
+            <a:schemeClr val="accent4">
+              <a:lumMod val="20000"/>
+              <a:lumOff val="80000"/>
+            </a:schemeClr>
+          </a:solidFill>
+          <a:ln>
+            <a:solidFill>
+              <a:srgbClr val="FF0000"/>
+            </a:solidFill>
+          </a:ln>
         </p:spPr>
         <p:txBody>
           <a:bodyPr wrap="square" rtlCol="0">
@@ -15975,8 +16404,15 @@
           </a:bodyPr>
           <a:lstStyle/>
           <a:p>
-            <a:r>
-              <a:rPr lang="en-US" dirty="0"/>
+            <a:pPr marL="285750" indent="-285750">
+              <a:buFont typeface="Arial" panose="020B0604020202020204" pitchFamily="34" charset="0"/>
+              <a:buChar char="•"/>
+            </a:pPr>
+            <a:r>
+              <a:rPr lang="en-US" dirty="0">
+                <a:latin typeface="Calibri" panose="020F0502020204030204" pitchFamily="34" charset="0"/>
+                <a:cs typeface="Calibri" panose="020F0502020204030204" pitchFamily="34" charset="0"/>
+              </a:rPr>
               <a:t>Multilevel models can be used as an alternative to </a:t>
             </a:r>
             <a:r>
@@ -15984,196 +16420,258 @@
                 <a:solidFill>
                   <a:srgbClr val="0070C0"/>
                 </a:solidFill>
+                <a:latin typeface="Calibri" panose="020F0502020204030204" pitchFamily="34" charset="0"/>
+                <a:cs typeface="Calibri" panose="020F0502020204030204" pitchFamily="34" charset="0"/>
               </a:rPr>
               <a:t>ANCOVA</a:t>
             </a:r>
             <a:r>
-              <a:rPr lang="en-US" dirty="0"/>
+              <a:rPr lang="en-US" dirty="0">
+                <a:latin typeface="Calibri" panose="020F0502020204030204" pitchFamily="34" charset="0"/>
+                <a:cs typeface="Calibri" panose="020F0502020204030204" pitchFamily="34" charset="0"/>
+              </a:rPr>
               <a:t> (Analysis of Covariance). </a:t>
             </a:r>
           </a:p>
           <a:p>
+            <a:pPr marL="285750" indent="-285750">
+              <a:buFont typeface="Arial" panose="020B0604020202020204" pitchFamily="34" charset="0"/>
+              <a:buChar char="•"/>
+            </a:pPr>
             <a:r>
               <a:rPr lang="en-US" b="1" dirty="0">
                 <a:solidFill>
                   <a:srgbClr val="0070C0"/>
                 </a:solidFill>
+                <a:latin typeface="Calibri" panose="020F0502020204030204" pitchFamily="34" charset="0"/>
+                <a:cs typeface="Calibri" panose="020F0502020204030204" pitchFamily="34" charset="0"/>
               </a:rPr>
               <a:t>ANCOVA</a:t>
             </a:r>
             <a:r>
-              <a:rPr lang="en-US" dirty="0"/>
+              <a:rPr lang="en-US" dirty="0">
+                <a:latin typeface="Calibri" panose="020F0502020204030204" pitchFamily="34" charset="0"/>
+                <a:cs typeface="Calibri" panose="020F0502020204030204" pitchFamily="34" charset="0"/>
+              </a:rPr>
               <a:t> blends ANOVA and regression. </a:t>
-            </a:r>
-            <a:br>
-              <a:rPr lang="en-US" dirty="0"/>
-            </a:br>
-            <a:r>
-              <a:rPr lang="en-US" b="1" dirty="0">
-                <a:solidFill>
-                  <a:srgbClr val="0070C0"/>
-                </a:solidFill>
-              </a:rPr>
-              <a:t>ANCOVA</a:t>
-            </a:r>
-            <a:r>
-              <a:rPr lang="en-US" dirty="0"/>
-              <a:t> evaluates whether the means of a dependent variable </a:t>
-            </a:r>
-            <a:r>
-              <a:rPr lang="en-US" b="1" dirty="0">
-                <a:solidFill>
-                  <a:srgbClr val="0070C0"/>
-                </a:solidFill>
-              </a:rPr>
-              <a:t>"Y"</a:t>
-            </a:r>
-            <a:r>
-              <a:rPr lang="en-US" dirty="0"/>
-              <a:t> </a:t>
             </a:r>
           </a:p>
           <a:p>
-            <a:r>
-              <a:rPr lang="en-US" dirty="0"/>
-              <a:t>are equal across levels of a categorical independent variable </a:t>
-            </a:r>
+            <a:pPr marL="285750" indent="-285750">
+              <a:buFont typeface="Arial" panose="020B0604020202020204" pitchFamily="34" charset="0"/>
+              <a:buChar char="•"/>
+            </a:pPr>
             <a:r>
               <a:rPr lang="en-US" b="1" dirty="0">
                 <a:solidFill>
                   <a:srgbClr val="0070C0"/>
                 </a:solidFill>
+                <a:latin typeface="Calibri" panose="020F0502020204030204" pitchFamily="34" charset="0"/>
+                <a:cs typeface="Calibri" panose="020F0502020204030204" pitchFamily="34" charset="0"/>
+              </a:rPr>
+              <a:t>ANCOVA</a:t>
+            </a:r>
+            <a:r>
+              <a:rPr lang="en-US" dirty="0">
+                <a:latin typeface="Calibri" panose="020F0502020204030204" pitchFamily="34" charset="0"/>
+                <a:cs typeface="Calibri" panose="020F0502020204030204" pitchFamily="34" charset="0"/>
+              </a:rPr>
+              <a:t> evaluates whether the means of a dependent variable </a:t>
+            </a:r>
+            <a:r>
+              <a:rPr lang="en-US" b="1" dirty="0">
+                <a:solidFill>
+                  <a:srgbClr val="0070C0"/>
+                </a:solidFill>
+                <a:latin typeface="Calibri" panose="020F0502020204030204" pitchFamily="34" charset="0"/>
+                <a:cs typeface="Calibri" panose="020F0502020204030204" pitchFamily="34" charset="0"/>
+              </a:rPr>
+              <a:t>"Y"</a:t>
+            </a:r>
+            <a:r>
+              <a:rPr lang="en-US" dirty="0">
+                <a:latin typeface="Calibri" panose="020F0502020204030204" pitchFamily="34" charset="0"/>
+                <a:cs typeface="Calibri" panose="020F0502020204030204" pitchFamily="34" charset="0"/>
+              </a:rPr>
+              <a:t> are equal across levels of a categorical independent variable </a:t>
+            </a:r>
+            <a:r>
+              <a:rPr lang="en-US" b="1" dirty="0">
+                <a:solidFill>
+                  <a:srgbClr val="0070C0"/>
+                </a:solidFill>
+                <a:latin typeface="Calibri" panose="020F0502020204030204" pitchFamily="34" charset="0"/>
+                <a:cs typeface="Calibri" panose="020F0502020204030204" pitchFamily="34" charset="0"/>
               </a:rPr>
               <a:t>"X"</a:t>
             </a:r>
             <a:r>
-              <a:rPr lang="en-US" dirty="0"/>
-              <a:t> often called a treatment, </a:t>
+              <a:rPr lang="en-US" dirty="0">
+                <a:latin typeface="Calibri" panose="020F0502020204030204" pitchFamily="34" charset="0"/>
+                <a:cs typeface="Calibri" panose="020F0502020204030204" pitchFamily="34" charset="0"/>
+              </a:rPr>
+              <a:t> often called a treatment, while statistically controlling for the effects of other continuous variables (a.k.a. covariates </a:t>
+            </a:r>
+            <a:r>
+              <a:rPr lang="en-US" b="1" dirty="0">
+                <a:solidFill>
+                  <a:srgbClr val="0070C0"/>
+                </a:solidFill>
+                <a:latin typeface="Calibri" panose="020F0502020204030204" pitchFamily="34" charset="0"/>
+                <a:cs typeface="Calibri" panose="020F0502020204030204" pitchFamily="34" charset="0"/>
+              </a:rPr>
+              <a:t>"CVs"</a:t>
+            </a:r>
+            <a:r>
+              <a:rPr lang="en-US" dirty="0">
+                <a:latin typeface="Calibri" panose="020F0502020204030204" pitchFamily="34" charset="0"/>
+                <a:cs typeface="Calibri" panose="020F0502020204030204" pitchFamily="34" charset="0"/>
+              </a:rPr>
+              <a:t> or nuisance variables). </a:t>
             </a:r>
           </a:p>
           <a:p>
-            <a:r>
-              <a:rPr lang="en-US" dirty="0"/>
-              <a:t>while statistically controlling for the effects of other continuous variables (a.k.a. covariates </a:t>
+            <a:pPr marL="285750" indent="-285750">
+              <a:buFont typeface="Arial" panose="020B0604020202020204" pitchFamily="34" charset="0"/>
+              <a:buChar char="•"/>
+            </a:pPr>
+            <a:r>
+              <a:rPr lang="en-US" dirty="0">
+                <a:latin typeface="Calibri" panose="020F0502020204030204" pitchFamily="34" charset="0"/>
+                <a:cs typeface="Calibri" panose="020F0502020204030204" pitchFamily="34" charset="0"/>
+              </a:rPr>
+              <a:t>Mathematically, </a:t>
             </a:r>
             <a:r>
               <a:rPr lang="en-US" b="1" dirty="0">
                 <a:solidFill>
                   <a:srgbClr val="0070C0"/>
                 </a:solidFill>
-              </a:rPr>
-              <a:t>"CVs"</a:t>
-            </a:r>
-            <a:r>
-              <a:rPr lang="en-US" dirty="0"/>
-              <a:t> or nuisance variables). </a:t>
+                <a:latin typeface="Calibri" panose="020F0502020204030204" pitchFamily="34" charset="0"/>
+                <a:cs typeface="Calibri" panose="020F0502020204030204" pitchFamily="34" charset="0"/>
+              </a:rPr>
+              <a:t>ANCOVA</a:t>
+            </a:r>
+            <a:r>
+              <a:rPr lang="en-US" dirty="0">
+                <a:latin typeface="Calibri" panose="020F0502020204030204" pitchFamily="34" charset="0"/>
+                <a:cs typeface="Calibri" panose="020F0502020204030204" pitchFamily="34" charset="0"/>
+              </a:rPr>
+              <a:t> decomposes the variance in the </a:t>
+            </a:r>
+            <a:r>
+              <a:rPr lang="en-US" b="1" dirty="0">
+                <a:solidFill>
+                  <a:srgbClr val="0070C0"/>
+                </a:solidFill>
+                <a:latin typeface="Calibri" panose="020F0502020204030204" pitchFamily="34" charset="0"/>
+                <a:cs typeface="Calibri" panose="020F0502020204030204" pitchFamily="34" charset="0"/>
+              </a:rPr>
+              <a:t>"Y"</a:t>
+            </a:r>
+            <a:r>
+              <a:rPr lang="en-US" dirty="0">
+                <a:latin typeface="Calibri" panose="020F0502020204030204" pitchFamily="34" charset="0"/>
+                <a:cs typeface="Calibri" panose="020F0502020204030204" pitchFamily="34" charset="0"/>
+              </a:rPr>
+              <a:t> into variance explained by the </a:t>
+            </a:r>
+            <a:r>
+              <a:rPr lang="en-US" b="1" dirty="0">
+                <a:solidFill>
+                  <a:srgbClr val="0070C0"/>
+                </a:solidFill>
+                <a:latin typeface="Calibri" panose="020F0502020204030204" pitchFamily="34" charset="0"/>
+                <a:cs typeface="Calibri" panose="020F0502020204030204" pitchFamily="34" charset="0"/>
+              </a:rPr>
+              <a:t>CVs</a:t>
+            </a:r>
+            <a:r>
+              <a:rPr lang="en-US" dirty="0">
+                <a:latin typeface="Calibri" panose="020F0502020204030204" pitchFamily="34" charset="0"/>
+                <a:cs typeface="Calibri" panose="020F0502020204030204" pitchFamily="34" charset="0"/>
+              </a:rPr>
+              <a:t>, variance explained by the categorical </a:t>
+            </a:r>
+            <a:r>
+              <a:rPr lang="en-US" b="1" dirty="0">
+                <a:solidFill>
+                  <a:srgbClr val="0070C0"/>
+                </a:solidFill>
+                <a:latin typeface="Calibri" panose="020F0502020204030204" pitchFamily="34" charset="0"/>
+                <a:cs typeface="Calibri" panose="020F0502020204030204" pitchFamily="34" charset="0"/>
+              </a:rPr>
+              <a:t>"X"</a:t>
+            </a:r>
+            <a:r>
+              <a:rPr lang="en-US" dirty="0">
+                <a:latin typeface="Calibri" panose="020F0502020204030204" pitchFamily="34" charset="0"/>
+                <a:cs typeface="Calibri" panose="020F0502020204030204" pitchFamily="34" charset="0"/>
+              </a:rPr>
+              <a:t>, and residual variance. </a:t>
             </a:r>
           </a:p>
           <a:p>
-            <a:endParaRPr lang="en-US" dirty="0"/>
-          </a:p>
-          <a:p>
-            <a:r>
-              <a:rPr lang="en-US" dirty="0"/>
-              <a:t>Mathematically, </a:t>
+            <a:pPr marL="285750" indent="-285750">
+              <a:buFont typeface="Arial" panose="020B0604020202020204" pitchFamily="34" charset="0"/>
+              <a:buChar char="•"/>
+            </a:pPr>
+            <a:r>
+              <a:rPr lang="en-US" dirty="0">
+                <a:latin typeface="Calibri" panose="020F0502020204030204" pitchFamily="34" charset="0"/>
+                <a:cs typeface="Calibri" panose="020F0502020204030204" pitchFamily="34" charset="0"/>
+              </a:rPr>
+              <a:t>Intuitively, </a:t>
             </a:r>
             <a:r>
               <a:rPr lang="en-US" b="1" dirty="0">
                 <a:solidFill>
                   <a:srgbClr val="0070C0"/>
                 </a:solidFill>
+                <a:latin typeface="Calibri" panose="020F0502020204030204" pitchFamily="34" charset="0"/>
+                <a:cs typeface="Calibri" panose="020F0502020204030204" pitchFamily="34" charset="0"/>
               </a:rPr>
               <a:t>ANCOVA</a:t>
             </a:r>
             <a:r>
-              <a:rPr lang="en-US" dirty="0"/>
-              <a:t> decomposes the variance in the </a:t>
+              <a:rPr lang="en-US" dirty="0">
+                <a:latin typeface="Calibri" panose="020F0502020204030204" pitchFamily="34" charset="0"/>
+                <a:cs typeface="Calibri" panose="020F0502020204030204" pitchFamily="34" charset="0"/>
+              </a:rPr>
+              <a:t> can be thought of as 'adjusting' the </a:t>
             </a:r>
             <a:r>
               <a:rPr lang="en-US" b="1" dirty="0">
                 <a:solidFill>
                   <a:srgbClr val="0070C0"/>
                 </a:solidFill>
+                <a:latin typeface="Calibri" panose="020F0502020204030204" pitchFamily="34" charset="0"/>
+                <a:cs typeface="Calibri" panose="020F0502020204030204" pitchFamily="34" charset="0"/>
               </a:rPr>
               <a:t>"Y"</a:t>
             </a:r>
             <a:r>
-              <a:rPr lang="en-US" dirty="0"/>
-              <a:t> into variance explained by the </a:t>
+              <a:rPr lang="en-US" dirty="0">
+                <a:latin typeface="Calibri" panose="020F0502020204030204" pitchFamily="34" charset="0"/>
+                <a:cs typeface="Calibri" panose="020F0502020204030204" pitchFamily="34" charset="0"/>
+              </a:rPr>
+              <a:t> by the group means of the </a:t>
             </a:r>
             <a:r>
               <a:rPr lang="en-US" b="1" dirty="0">
                 <a:solidFill>
                   <a:srgbClr val="0070C0"/>
                 </a:solidFill>
+                <a:latin typeface="Calibri" panose="020F0502020204030204" pitchFamily="34" charset="0"/>
+                <a:cs typeface="Calibri" panose="020F0502020204030204" pitchFamily="34" charset="0"/>
               </a:rPr>
               <a:t>CVs</a:t>
             </a:r>
             <a:r>
-              <a:rPr lang="en-US" dirty="0"/>
-              <a:t>, </a:t>
-            </a:r>
-          </a:p>
-          <a:p>
-            <a:r>
-              <a:rPr lang="en-US" dirty="0"/>
-              <a:t>variance explained by the categorical </a:t>
-            </a:r>
-            <a:r>
-              <a:rPr lang="en-US" b="1" dirty="0">
-                <a:solidFill>
-                  <a:srgbClr val="0070C0"/>
-                </a:solidFill>
-              </a:rPr>
-              <a:t>"X"</a:t>
-            </a:r>
-            <a:r>
-              <a:rPr lang="en-US" dirty="0"/>
-              <a:t>, and residual variance. </a:t>
-            </a:r>
-          </a:p>
-          <a:p>
-            <a:endParaRPr lang="en-US" dirty="0"/>
-          </a:p>
-          <a:p>
-            <a:r>
-              <a:rPr lang="en-US" dirty="0"/>
-              <a:t>Intuitively, </a:t>
-            </a:r>
-            <a:r>
-              <a:rPr lang="en-US" b="1" dirty="0">
-                <a:solidFill>
-                  <a:srgbClr val="0070C0"/>
-                </a:solidFill>
-              </a:rPr>
-              <a:t>ANCOVA</a:t>
-            </a:r>
-            <a:r>
-              <a:rPr lang="en-US" dirty="0"/>
-              <a:t> can be thought of as 'adjusting' the </a:t>
-            </a:r>
-            <a:r>
-              <a:rPr lang="en-US" b="1" dirty="0">
-                <a:solidFill>
-                  <a:srgbClr val="0070C0"/>
-                </a:solidFill>
-              </a:rPr>
-              <a:t>"Y"</a:t>
-            </a:r>
-            <a:r>
-              <a:rPr lang="en-US" dirty="0"/>
-              <a:t> by the group means of the </a:t>
-            </a:r>
-            <a:r>
-              <a:rPr lang="en-US" b="1" dirty="0">
-                <a:solidFill>
-                  <a:srgbClr val="0070C0"/>
-                </a:solidFill>
-              </a:rPr>
-              <a:t>CVs</a:t>
-            </a:r>
-            <a:r>
-              <a:rPr lang="en-US" dirty="0"/>
+              <a:rPr lang="en-US" dirty="0">
+                <a:latin typeface="Calibri" panose="020F0502020204030204" pitchFamily="34" charset="0"/>
+                <a:cs typeface="Calibri" panose="020F0502020204030204" pitchFamily="34" charset="0"/>
+              </a:rPr>
               <a:t>.</a:t>
             </a:r>
           </a:p>
@@ -16194,7 +16692,7 @@
           <p:nvPr/>
         </p:nvPicPr>
         <p:blipFill>
-          <a:blip r:embed="rId4"/>
+          <a:blip r:embed="rId3"/>
           <a:stretch>
             <a:fillRect/>
           </a:stretch>
@@ -16209,6 +16707,64 @@
           </a:prstGeom>
         </p:spPr>
       </p:pic>
+      <p:sp>
+        <p:nvSpPr>
+          <p:cNvPr id="8" name="TextBox 7">
+            <a:extLst>
+              <a:ext uri="{FF2B5EF4-FFF2-40B4-BE49-F238E27FC236}">
+                <a16:creationId xmlns:a16="http://schemas.microsoft.com/office/drawing/2014/main" id="{5417B59C-7745-A02A-BAE8-CCC35504ABB9}"/>
+              </a:ext>
+            </a:extLst>
+          </p:cNvPr>
+          <p:cNvSpPr txBox="1"/>
+          <p:nvPr/>
+        </p:nvSpPr>
+        <p:spPr>
+          <a:xfrm>
+            <a:off x="0" y="0"/>
+            <a:ext cx="5245100" cy="861774"/>
+          </a:xfrm>
+          <a:prstGeom prst="rect">
+            <a:avLst/>
+          </a:prstGeom>
+          <a:noFill/>
+        </p:spPr>
+        <p:txBody>
+          <a:bodyPr wrap="square" rtlCol="0">
+            <a:spAutoFit/>
+          </a:bodyPr>
+          <a:lstStyle/>
+          <a:p>
+            <a:r>
+              <a:rPr lang="en-US" sz="2800" b="1" dirty="0">
+                <a:latin typeface="Calibri" panose="020F0502020204030204" pitchFamily="34" charset="0"/>
+                <a:cs typeface="Calibri" panose="020F0502020204030204" pitchFamily="34" charset="0"/>
+              </a:rPr>
+              <a:t>ANOVA – Multilevel Model</a:t>
+            </a:r>
+          </a:p>
+          <a:p>
+            <a:endParaRPr lang="en-US" sz="800" dirty="0">
+              <a:latin typeface="Calibri" panose="020F0502020204030204" pitchFamily="34" charset="0"/>
+              <a:cs typeface="Calibri" panose="020F0502020204030204" pitchFamily="34" charset="0"/>
+            </a:endParaRPr>
+          </a:p>
+          <a:p>
+            <a:r>
+              <a:rPr lang="en-US" dirty="0">
+                <a:latin typeface="Calibri" panose="020F0502020204030204" pitchFamily="34" charset="0"/>
+                <a:cs typeface="Calibri" panose="020F0502020204030204" pitchFamily="34" charset="0"/>
+                <a:hlinkClick r:id="rId4"/>
+              </a:rPr>
+              <a:t>https://en.wikipedia.org/wiki/Multilevel_model</a:t>
+            </a:r>
+            <a:endParaRPr lang="en-US" dirty="0">
+              <a:latin typeface="Calibri" panose="020F0502020204030204" pitchFamily="34" charset="0"/>
+              <a:cs typeface="Calibri" panose="020F0502020204030204" pitchFamily="34" charset="0"/>
+            </a:endParaRPr>
+          </a:p>
+        </p:txBody>
+      </p:sp>
     </p:spTree>
     <p:extLst>
       <p:ext uri="{BB962C8B-B14F-4D97-AF65-F5344CB8AC3E}">
@@ -16254,7 +16810,7 @@
         <p:spPr>
           <a:xfrm>
             <a:off x="0" y="0"/>
-            <a:ext cx="5813155" cy="1754326"/>
+            <a:ext cx="4441371" cy="892552"/>
           </a:xfrm>
           <a:prstGeom prst="rect">
             <a:avLst/>
@@ -16268,57 +16824,47 @@
           <a:lstStyle/>
           <a:p>
             <a:r>
-              <a:rPr lang="en-US" sz="2400" b="1" dirty="0"/>
+              <a:rPr lang="en-US" sz="2400" b="1" dirty="0">
+                <a:latin typeface="Calibri" panose="020F0502020204030204" pitchFamily="34" charset="0"/>
+                <a:cs typeface="Calibri" panose="020F0502020204030204" pitchFamily="34" charset="0"/>
+              </a:rPr>
               <a:t>Fisher Exact Test</a:t>
             </a:r>
+            <a:endParaRPr lang="en-US" dirty="0">
+              <a:latin typeface="Calibri" panose="020F0502020204030204" pitchFamily="34" charset="0"/>
+              <a:cs typeface="Calibri" panose="020F0502020204030204" pitchFamily="34" charset="0"/>
+            </a:endParaRPr>
           </a:p>
           <a:p>
-            <a:endParaRPr lang="en-US" dirty="0"/>
+            <a:r>
+              <a:rPr lang="en-US" dirty="0">
+                <a:latin typeface="Calibri" panose="020F0502020204030204" pitchFamily="34" charset="0"/>
+                <a:cs typeface="Calibri" panose="020F0502020204030204" pitchFamily="34" charset="0"/>
+              </a:rPr>
+              <a:t>From Fisher's book "The Design of Experiments" (1935)</a:t>
+            </a:r>
           </a:p>
           <a:p>
             <a:r>
-              <a:rPr lang="en-US" dirty="0"/>
-              <a:t>From Fisher's book "The Design of Experiments" (1935)</a:t>
-            </a:r>
-          </a:p>
-          <a:p>
-            <a:r>
-              <a:rPr lang="en-US" dirty="0"/>
+              <a:rPr lang="en-US" dirty="0">
+                <a:latin typeface="Calibri" panose="020F0502020204030204" pitchFamily="34" charset="0"/>
+                <a:cs typeface="Calibri" panose="020F0502020204030204" pitchFamily="34" charset="0"/>
+              </a:rPr>
               <a:t>Lady Tasting Tea example in 2</a:t>
             </a:r>
             <a:r>
-              <a:rPr lang="en-US" baseline="30000" dirty="0"/>
+              <a:rPr lang="en-US" baseline="30000" dirty="0">
+                <a:latin typeface="Calibri" panose="020F0502020204030204" pitchFamily="34" charset="0"/>
+                <a:cs typeface="Calibri" panose="020F0502020204030204" pitchFamily="34" charset="0"/>
+              </a:rPr>
               <a:t>nd</a:t>
             </a:r>
             <a:r>
-              <a:rPr lang="en-US" dirty="0"/>
+              <a:rPr lang="en-US" dirty="0">
+                <a:latin typeface="Calibri" panose="020F0502020204030204" pitchFamily="34" charset="0"/>
+                <a:cs typeface="Calibri" panose="020F0502020204030204" pitchFamily="34" charset="0"/>
+              </a:rPr>
               <a:t> chapter</a:t>
-            </a:r>
-          </a:p>
-          <a:p>
-            <a:r>
-              <a:rPr lang="en-US" dirty="0"/>
-              <a:t>Lady claimed that she can distinguish between two types of cups of tea:</a:t>
-            </a:r>
-          </a:p>
-          <a:p>
-            <a:pPr marL="342900" lvl="2" indent="-342900">
-              <a:buFont typeface="+mj-lt"/>
-              <a:buAutoNum type="arabicPeriod"/>
-            </a:pPr>
-            <a:r>
-              <a:rPr lang="en-US" dirty="0"/>
-              <a:t>tea added first, then milk </a:t>
-            </a:r>
-          </a:p>
-          <a:p>
-            <a:pPr marL="342900" lvl="2" indent="-342900">
-              <a:buFont typeface="+mj-lt"/>
-              <a:buAutoNum type="arabicPeriod"/>
-            </a:pPr>
-            <a:r>
-              <a:rPr lang="en-US" dirty="0"/>
-              <a:t>milk added first, then tea</a:t>
             </a:r>
           </a:p>
         </p:txBody>
@@ -16408,7 +16954,7 @@
         </p:nvSpPr>
         <p:spPr>
           <a:xfrm>
-            <a:off x="8576858" y="3276468"/>
+            <a:off x="9088922" y="3314550"/>
             <a:ext cx="636105" cy="307777"/>
           </a:xfrm>
           <a:prstGeom prst="rect">
@@ -16423,7 +16969,11 @@
           <a:lstStyle/>
           <a:p>
             <a:r>
-              <a:rPr lang="en-US" dirty="0"/>
+              <a:rPr lang="en-US" b="1" dirty="0">
+                <a:solidFill>
+                  <a:srgbClr val="00B050"/>
+                </a:solidFill>
+              </a:rPr>
               <a:t>1935</a:t>
             </a:r>
           </a:p>
@@ -16565,7 +17115,7 @@
         </p:blipFill>
         <p:spPr>
           <a:xfrm>
-            <a:off x="6541380" y="1086961"/>
+            <a:off x="6340963" y="1858980"/>
             <a:ext cx="1567420" cy="1175565"/>
           </a:xfrm>
           <a:prstGeom prst="rect">
@@ -16587,8 +17137,8 @@
         </p:nvSpPr>
         <p:spPr>
           <a:xfrm>
-            <a:off x="47140" y="1812235"/>
-            <a:ext cx="5813155" cy="2462213"/>
+            <a:off x="94363" y="1817441"/>
+            <a:ext cx="6177542" cy="2369880"/>
           </a:xfrm>
           <a:prstGeom prst="rect">
             <a:avLst/>
@@ -16602,45 +17152,77 @@
           <a:lstStyle/>
           <a:p>
             <a:r>
-              <a:rPr lang="en-US" dirty="0"/>
-              <a:t>Author introduces the concept of "</a:t>
+              <a:rPr lang="en-US" dirty="0">
+                <a:latin typeface="Calibri" panose="020F0502020204030204" pitchFamily="34" charset="0"/>
+                <a:cs typeface="Calibri" panose="020F0502020204030204" pitchFamily="34" charset="0"/>
+              </a:rPr>
+              <a:t>Fisher introduces the concept of "</a:t>
             </a:r>
             <a:r>
               <a:rPr lang="en-US" b="1" dirty="0">
                 <a:solidFill>
                   <a:srgbClr val="FF0000"/>
                 </a:solidFill>
+                <a:latin typeface="Calibri" panose="020F0502020204030204" pitchFamily="34" charset="0"/>
+                <a:cs typeface="Calibri" panose="020F0502020204030204" pitchFamily="34" charset="0"/>
               </a:rPr>
               <a:t>null hypothesis</a:t>
             </a:r>
             <a:r>
-              <a:rPr lang="en-US" dirty="0"/>
+              <a:rPr lang="en-US" dirty="0">
+                <a:latin typeface="Calibri" panose="020F0502020204030204" pitchFamily="34" charset="0"/>
+                <a:cs typeface="Calibri" panose="020F0502020204030204" pitchFamily="34" charset="0"/>
+              </a:rPr>
               <a:t>"</a:t>
             </a:r>
           </a:p>
           <a:p>
-            <a:endParaRPr lang="en-US" dirty="0"/>
+            <a:endParaRPr lang="en-US" dirty="0">
+              <a:latin typeface="Calibri" panose="020F0502020204030204" pitchFamily="34" charset="0"/>
+              <a:cs typeface="Calibri" panose="020F0502020204030204" pitchFamily="34" charset="0"/>
+            </a:endParaRPr>
           </a:p>
           <a:p>
             <a:r>
-              <a:rPr lang="en-US" dirty="0"/>
+              <a:rPr lang="en-US" dirty="0">
+                <a:solidFill>
+                  <a:srgbClr val="00B050"/>
+                </a:solidFill>
+                <a:latin typeface="Calibri" panose="020F0502020204030204" pitchFamily="34" charset="0"/>
+                <a:cs typeface="Calibri" panose="020F0502020204030204" pitchFamily="34" charset="0"/>
+              </a:rPr>
               <a:t>Experiment: given 4 cups of type 1 and 4 cups of type 2.</a:t>
             </a:r>
           </a:p>
           <a:p>
             <a:r>
-              <a:rPr lang="en-US" dirty="0"/>
+              <a:rPr lang="en-US" dirty="0">
+                <a:solidFill>
+                  <a:srgbClr val="00B050"/>
+                </a:solidFill>
+                <a:latin typeface="Calibri" panose="020F0502020204030204" pitchFamily="34" charset="0"/>
+                <a:cs typeface="Calibri" panose="020F0502020204030204" pitchFamily="34" charset="0"/>
+              </a:rPr>
               <a:t>They look the same.</a:t>
             </a:r>
           </a:p>
           <a:p>
             <a:r>
-              <a:rPr lang="en-US" dirty="0"/>
+              <a:rPr lang="en-US" dirty="0">
+                <a:solidFill>
+                  <a:srgbClr val="00B050"/>
+                </a:solidFill>
+                <a:latin typeface="Calibri" panose="020F0502020204030204" pitchFamily="34" charset="0"/>
+                <a:cs typeface="Calibri" panose="020F0502020204030204" pitchFamily="34" charset="0"/>
+              </a:rPr>
               <a:t>Lady tests them and labels the "milk first" ones.</a:t>
             </a:r>
           </a:p>
           <a:p>
-            <a:endParaRPr lang="en-US" dirty="0"/>
+            <a:endParaRPr lang="en-US" dirty="0">
+              <a:latin typeface="Calibri" panose="020F0502020204030204" pitchFamily="34" charset="0"/>
+              <a:cs typeface="Calibri" panose="020F0502020204030204" pitchFamily="34" charset="0"/>
+            </a:endParaRPr>
           </a:p>
           <a:p>
             <a:r>
@@ -16648,23 +17230,36 @@
                 <a:solidFill>
                   <a:srgbClr val="FF0000"/>
                 </a:solidFill>
+                <a:latin typeface="Calibri" panose="020F0502020204030204" pitchFamily="34" charset="0"/>
+                <a:cs typeface="Calibri" panose="020F0502020204030204" pitchFamily="34" charset="0"/>
               </a:rPr>
               <a:t>The test is called "exact" because Fisher demonstrates how in this case he can calculate exact probability of each outcome.</a:t>
             </a:r>
           </a:p>
           <a:p>
-            <a:endParaRPr lang="en-US" dirty="0"/>
+            <a:endParaRPr lang="en-US" dirty="0">
+              <a:latin typeface="Calibri" panose="020F0502020204030204" pitchFamily="34" charset="0"/>
+              <a:cs typeface="Calibri" panose="020F0502020204030204" pitchFamily="34" charset="0"/>
+            </a:endParaRPr>
           </a:p>
           <a:p>
             <a:r>
-              <a:rPr lang="en-US" dirty="0"/>
-              <a:t>If she guessed 3 out of 4, the probability is 16/70 = 0.22 – not good</a:t>
+              <a:rPr lang="en-US" sz="1100" dirty="0">
+                <a:latin typeface="Menlo" panose="020B0609030804020204" pitchFamily="49" charset="0"/>
+                <a:ea typeface="Menlo" panose="020B0609030804020204" pitchFamily="49" charset="0"/>
+                <a:cs typeface="Menlo" panose="020B0609030804020204" pitchFamily="49" charset="0"/>
+              </a:rPr>
+              <a:t>If she guessed 3 out of 4, the probability is 16/70 = 0.22 - not good</a:t>
             </a:r>
           </a:p>
           <a:p>
             <a:r>
-              <a:rPr lang="en-US" dirty="0"/>
-              <a:t>If she guessed 4 out of 4 – the probability is 1/70 &lt; 0.05 - good</a:t>
+              <a:rPr lang="en-US" sz="1100" dirty="0">
+                <a:latin typeface="Menlo" panose="020B0609030804020204" pitchFamily="49" charset="0"/>
+                <a:ea typeface="Menlo" panose="020B0609030804020204" pitchFamily="49" charset="0"/>
+                <a:cs typeface="Menlo" panose="020B0609030804020204" pitchFamily="49" charset="0"/>
+              </a:rPr>
+              <a:t>If she guessed 4 out of 4, the probability is  1/70 &lt; 0.05 - good</a:t>
             </a:r>
           </a:p>
         </p:txBody>
@@ -16683,7 +17278,7 @@
         </p:nvSpPr>
         <p:spPr>
           <a:xfrm>
-            <a:off x="93479" y="4469520"/>
+            <a:off x="162815" y="4587729"/>
             <a:ext cx="6040637" cy="2123658"/>
           </a:xfrm>
           <a:prstGeom prst="rect">
@@ -17165,6 +17760,80 @@
               <a:ea typeface="Menlo" panose="020B0609030804020204" pitchFamily="49" charset="0"/>
               <a:cs typeface="Menlo" panose="020B0609030804020204" pitchFamily="49" charset="0"/>
             </a:endParaRPr>
+          </a:p>
+        </p:txBody>
+      </p:sp>
+      <p:sp>
+        <p:nvSpPr>
+          <p:cNvPr id="15" name="TextBox 14">
+            <a:extLst>
+              <a:ext uri="{FF2B5EF4-FFF2-40B4-BE49-F238E27FC236}">
+                <a16:creationId xmlns:a16="http://schemas.microsoft.com/office/drawing/2014/main" id="{44553C97-6A07-1D3A-BDD9-C864A4D9B8B5}"/>
+              </a:ext>
+            </a:extLst>
+          </p:cNvPr>
+          <p:cNvSpPr txBox="1"/>
+          <p:nvPr/>
+        </p:nvSpPr>
+        <p:spPr>
+          <a:xfrm>
+            <a:off x="94363" y="1042793"/>
+            <a:ext cx="6001637" cy="738664"/>
+          </a:xfrm>
+          <a:prstGeom prst="rect">
+            <a:avLst/>
+          </a:prstGeom>
+          <a:solidFill>
+            <a:schemeClr val="accent4">
+              <a:lumMod val="20000"/>
+              <a:lumOff val="80000"/>
+            </a:schemeClr>
+          </a:solidFill>
+          <a:ln>
+            <a:solidFill>
+              <a:srgbClr val="FF0000"/>
+            </a:solidFill>
+          </a:ln>
+        </p:spPr>
+        <p:txBody>
+          <a:bodyPr wrap="square" rtlCol="0">
+            <a:spAutoFit/>
+          </a:bodyPr>
+          <a:lstStyle/>
+          <a:p>
+            <a:r>
+              <a:rPr lang="en-US" dirty="0">
+                <a:latin typeface="Calibri" panose="020F0502020204030204" pitchFamily="34" charset="0"/>
+                <a:cs typeface="Calibri" panose="020F0502020204030204" pitchFamily="34" charset="0"/>
+              </a:rPr>
+              <a:t>A lady claimed that she can distinguish between two types of cups of tea:</a:t>
+            </a:r>
+          </a:p>
+          <a:p>
+            <a:pPr marL="342900" lvl="2" indent="-342900">
+              <a:buFont typeface="+mj-lt"/>
+              <a:buAutoNum type="arabicPeriod"/>
+            </a:pPr>
+            <a:r>
+              <a:rPr lang="en-US" dirty="0">
+                <a:latin typeface="Calibri" panose="020F0502020204030204" pitchFamily="34" charset="0"/>
+                <a:cs typeface="Calibri" panose="020F0502020204030204" pitchFamily="34" charset="0"/>
+              </a:rPr>
+              <a:t>tea added first, then milk </a:t>
+            </a:r>
+          </a:p>
+          <a:p>
+            <a:pPr marL="342900" lvl="2" indent="-342900">
+              <a:buFont typeface="+mj-lt"/>
+              <a:buAutoNum type="arabicPeriod"/>
+            </a:pPr>
+            <a:r>
+              <a:rPr lang="en-US" dirty="0">
+                <a:latin typeface="Calibri" panose="020F0502020204030204" pitchFamily="34" charset="0"/>
+                <a:cs typeface="Calibri" panose="020F0502020204030204" pitchFamily="34" charset="0"/>
+              </a:rPr>
+              <a:t>milk added first, then tea</a:t>
+            </a:r>
           </a:p>
         </p:txBody>
       </p:sp>
